--- a/curso/pptx/S17.pptx
+++ b/curso/pptx/S17.pptx
@@ -3891,8 +3891,8 @@
         </p:nvSpPr>
         <p:spPr>
           <a:xfrm>
-            <a:off x="640000" y="420000"/>
-            <a:ext cx="10912000" cy="420000"/>
+            <a:off x="10652000" y="380000"/>
+            <a:ext cx="900000" cy="800000"/>
           </a:xfrm>
           <a:prstGeom prst="rect">
             <a:avLst/>
@@ -3907,17 +3907,17 @@
           <a:p>
             <a:pPr>
               <a:spcAft>
-                <a:spcPts val="810"/>
+                <a:spcPts val="1980"/>
               </a:spcAft>
             </a:pPr>
             <a:r>
-              <a:rPr sz="1800" b="1">
+              <a:rPr sz="4400" b="0">
                 <a:solidFill>
                   <a:srgbClr val="1F2A44"/>
                 </a:solidFill>
                 <a:latin typeface="Nunito Sans"/>
               </a:rPr>
-              <a:t>🦉 Aula de Filosofía</a:t>
+              <a:t>🙃</a:t>
             </a:r>
           </a:p>
         </p:txBody>

--- a/curso/pptx/S17.pptx
+++ b/curso/pptx/S17.pptx
@@ -472,426 +472,6 @@
     </a:lvl9pPr>
   </p:notesStyle>
 </p:notesMaster>
-</file>
-
-<file path=ppt/notesSlides/notesSlide1.xml><?xml version="1.0" encoding="utf-8"?>
-<p:notes xmlns:a="http://schemas.openxmlformats.org/drawingml/2006/main" xmlns:p="http://schemas.openxmlformats.org/presentationml/2006/main" xmlns:r="http://schemas.openxmlformats.org/officeDocument/2006/relationships">
-  <p:cSld>
-    <p:spTree>
-      <p:nvGrpSpPr>
-        <p:cNvPr id="1" name=""/>
-        <p:cNvGrpSpPr/>
-        <p:nvPr/>
-      </p:nvGrpSpPr>
-      <p:grpSpPr>
-        <a:xfrm>
-          <a:off x="0" y="0"/>
-          <a:ext cx="0" cy="0"/>
-          <a:chOff x="0" y="0"/>
-          <a:chExt cx="0" cy="0"/>
-        </a:xfrm>
-      </p:grpSpPr>
-      <p:sp>
-        <p:nvSpPr>
-          <p:cNvPr id="2" name="Slide Image Placeholder 1"/>
-          <p:cNvSpPr>
-            <a:spLocks noGrp="1"/>
-          </p:cNvSpPr>
-          <p:nvPr>
-            <p:ph type="sldImg" idx="2"/>
-          </p:nvPr>
-        </p:nvSpPr>
-        <p:spPr/>
-      </p:sp>
-      <p:sp>
-        <p:nvSpPr>
-          <p:cNvPr id="3" name="Notes Placeholder 2"/>
-          <p:cNvSpPr>
-            <a:spLocks noGrp="1"/>
-          </p:cNvSpPr>
-          <p:nvPr>
-            <p:ph type="body" idx="3" sz="quarter"/>
-          </p:nvPr>
-        </p:nvSpPr>
-        <p:spPr/>
-        <p:txBody>
-          <a:bodyPr/>
-          <a:lstStyle/>
-          <a:p>
-            <a:r>
-              <a:t>3 minutos. Sin apuntes. Es para recordar, no cuenta para nota.</a:t>
-            </a:r>
-          </a:p>
-        </p:txBody>
-      </p:sp>
-      <p:sp>
-        <p:nvSpPr>
-          <p:cNvPr id="4" name="Slide Number Placeholder 3"/>
-          <p:cNvSpPr>
-            <a:spLocks noGrp="1"/>
-          </p:cNvSpPr>
-          <p:nvPr>
-            <p:ph type="sldNum" idx="5" sz="quarter"/>
-          </p:nvPr>
-        </p:nvSpPr>
-        <p:spPr/>
-      </p:sp>
-    </p:spTree>
-  </p:cSld>
-  <p:clrMapOvr>
-    <a:masterClrMapping/>
-  </p:clrMapOvr>
-</p:notes>
-</file>
-
-<file path=ppt/notesSlides/notesSlide2.xml><?xml version="1.0" encoding="utf-8"?>
-<p:notes xmlns:a="http://schemas.openxmlformats.org/drawingml/2006/main" xmlns:p="http://schemas.openxmlformats.org/presentationml/2006/main" xmlns:r="http://schemas.openxmlformats.org/officeDocument/2006/relationships">
-  <p:cSld>
-    <p:spTree>
-      <p:nvGrpSpPr>
-        <p:cNvPr id="1" name=""/>
-        <p:cNvGrpSpPr/>
-        <p:nvPr/>
-      </p:nvGrpSpPr>
-      <p:grpSpPr>
-        <a:xfrm>
-          <a:off x="0" y="0"/>
-          <a:ext cx="0" cy="0"/>
-          <a:chOff x="0" y="0"/>
-          <a:chExt cx="0" cy="0"/>
-        </a:xfrm>
-      </p:grpSpPr>
-      <p:sp>
-        <p:nvSpPr>
-          <p:cNvPr id="2" name="Slide Image Placeholder 1"/>
-          <p:cNvSpPr>
-            <a:spLocks noGrp="1"/>
-          </p:cNvSpPr>
-          <p:nvPr>
-            <p:ph type="sldImg" idx="2"/>
-          </p:nvPr>
-        </p:nvSpPr>
-        <p:spPr/>
-      </p:sp>
-      <p:sp>
-        <p:nvSpPr>
-          <p:cNvPr id="3" name="Notes Placeholder 2"/>
-          <p:cNvSpPr>
-            <a:spLocks noGrp="1"/>
-          </p:cNvSpPr>
-          <p:nvPr>
-            <p:ph type="body" idx="3" sz="quarter"/>
-          </p:nvPr>
-        </p:nvSpPr>
-        <p:spPr/>
-        <p:txBody>
-          <a:bodyPr/>
-          <a:lstStyle/>
-          <a:p>
-            <a:r>
-              <a:t>3 minutos. Sin apuntes. Es para recordar, no cuenta para nota.</a:t>
-            </a:r>
-          </a:p>
-        </p:txBody>
-      </p:sp>
-      <p:sp>
-        <p:nvSpPr>
-          <p:cNvPr id="4" name="Slide Number Placeholder 3"/>
-          <p:cNvSpPr>
-            <a:spLocks noGrp="1"/>
-          </p:cNvSpPr>
-          <p:nvPr>
-            <p:ph type="sldNum" idx="5" sz="quarter"/>
-          </p:nvPr>
-        </p:nvSpPr>
-        <p:spPr/>
-      </p:sp>
-    </p:spTree>
-  </p:cSld>
-  <p:clrMapOvr>
-    <a:masterClrMapping/>
-  </p:clrMapOvr>
-</p:notes>
-</file>
-
-<file path=ppt/notesSlides/notesSlide3.xml><?xml version="1.0" encoding="utf-8"?>
-<p:notes xmlns:a="http://schemas.openxmlformats.org/drawingml/2006/main" xmlns:p="http://schemas.openxmlformats.org/presentationml/2006/main" xmlns:r="http://schemas.openxmlformats.org/officeDocument/2006/relationships">
-  <p:cSld>
-    <p:spTree>
-      <p:nvGrpSpPr>
-        <p:cNvPr id="1" name=""/>
-        <p:cNvGrpSpPr/>
-        <p:nvPr/>
-      </p:nvGrpSpPr>
-      <p:grpSpPr>
-        <a:xfrm>
-          <a:off x="0" y="0"/>
-          <a:ext cx="0" cy="0"/>
-          <a:chOff x="0" y="0"/>
-          <a:chExt cx="0" cy="0"/>
-        </a:xfrm>
-      </p:grpSpPr>
-      <p:sp>
-        <p:nvSpPr>
-          <p:cNvPr id="2" name="Slide Image Placeholder 1"/>
-          <p:cNvSpPr>
-            <a:spLocks noGrp="1"/>
-          </p:cNvSpPr>
-          <p:nvPr>
-            <p:ph type="sldImg" idx="2"/>
-          </p:nvPr>
-        </p:nvSpPr>
-        <p:spPr/>
-      </p:sp>
-      <p:sp>
-        <p:nvSpPr>
-          <p:cNvPr id="3" name="Notes Placeholder 2"/>
-          <p:cNvSpPr>
-            <a:spLocks noGrp="1"/>
-          </p:cNvSpPr>
-          <p:nvPr>
-            <p:ph type="body" idx="3" sz="quarter"/>
-          </p:nvPr>
-        </p:nvSpPr>
-        <p:spPr/>
-        <p:txBody>
-          <a:bodyPr/>
-          <a:lstStyle/>
-          <a:p>
-            <a:r>
-              <a:t>Nadie tiene que contestar: solo pensarlo.</a:t>
-            </a:r>
-          </a:p>
-        </p:txBody>
-      </p:sp>
-      <p:sp>
-        <p:nvSpPr>
-          <p:cNvPr id="4" name="Slide Number Placeholder 3"/>
-          <p:cNvSpPr>
-            <a:spLocks noGrp="1"/>
-          </p:cNvSpPr>
-          <p:nvPr>
-            <p:ph type="sldNum" idx="5" sz="quarter"/>
-          </p:nvPr>
-        </p:nvSpPr>
-        <p:spPr/>
-      </p:sp>
-    </p:spTree>
-  </p:cSld>
-  <p:clrMapOvr>
-    <a:masterClrMapping/>
-  </p:clrMapOvr>
-</p:notes>
-</file>
-
-<file path=ppt/notesSlides/notesSlide4.xml><?xml version="1.0" encoding="utf-8"?>
-<p:notes xmlns:a="http://schemas.openxmlformats.org/drawingml/2006/main" xmlns:p="http://schemas.openxmlformats.org/presentationml/2006/main" xmlns:r="http://schemas.openxmlformats.org/officeDocument/2006/relationships">
-  <p:cSld>
-    <p:spTree>
-      <p:nvGrpSpPr>
-        <p:cNvPr id="1" name=""/>
-        <p:cNvGrpSpPr/>
-        <p:nvPr/>
-      </p:nvGrpSpPr>
-      <p:grpSpPr>
-        <a:xfrm>
-          <a:off x="0" y="0"/>
-          <a:ext cx="0" cy="0"/>
-          <a:chOff x="0" y="0"/>
-          <a:chExt cx="0" cy="0"/>
-        </a:xfrm>
-      </p:grpSpPr>
-      <p:sp>
-        <p:nvSpPr>
-          <p:cNvPr id="2" name="Slide Image Placeholder 1"/>
-          <p:cNvSpPr>
-            <a:spLocks noGrp="1"/>
-          </p:cNvSpPr>
-          <p:nvPr>
-            <p:ph type="sldImg" idx="2"/>
-          </p:nvPr>
-        </p:nvSpPr>
-        <p:spPr/>
-      </p:sp>
-      <p:sp>
-        <p:nvSpPr>
-          <p:cNvPr id="3" name="Notes Placeholder 2"/>
-          <p:cNvSpPr>
-            <a:spLocks noGrp="1"/>
-          </p:cNvSpPr>
-          <p:nvPr>
-            <p:ph type="body" idx="3" sz="quarter"/>
-          </p:nvPr>
-        </p:nvSpPr>
-        <p:spPr/>
-        <p:txBody>
-          <a:bodyPr/>
-          <a:lstStyle/>
-          <a:p>
-            <a:r>
-              <a:t>Dejar unos segundos para que piensen la respuesta fácil antes de enseñar los pasos.</a:t>
-            </a:r>
-          </a:p>
-        </p:txBody>
-      </p:sp>
-      <p:sp>
-        <p:nvSpPr>
-          <p:cNvPr id="4" name="Slide Number Placeholder 3"/>
-          <p:cNvSpPr>
-            <a:spLocks noGrp="1"/>
-          </p:cNvSpPr>
-          <p:nvPr>
-            <p:ph type="sldNum" idx="5" sz="quarter"/>
-          </p:nvPr>
-        </p:nvSpPr>
-        <p:spPr/>
-      </p:sp>
-    </p:spTree>
-  </p:cSld>
-  <p:clrMapOvr>
-    <a:masterClrMapping/>
-  </p:clrMapOvr>
-</p:notes>
-</file>
-
-<file path=ppt/notesSlides/notesSlide5.xml><?xml version="1.0" encoding="utf-8"?>
-<p:notes xmlns:a="http://schemas.openxmlformats.org/drawingml/2006/main" xmlns:p="http://schemas.openxmlformats.org/presentationml/2006/main" xmlns:r="http://schemas.openxmlformats.org/officeDocument/2006/relationships">
-  <p:cSld>
-    <p:spTree>
-      <p:nvGrpSpPr>
-        <p:cNvPr id="1" name=""/>
-        <p:cNvGrpSpPr/>
-        <p:nvPr/>
-      </p:nvGrpSpPr>
-      <p:grpSpPr>
-        <a:xfrm>
-          <a:off x="0" y="0"/>
-          <a:ext cx="0" cy="0"/>
-          <a:chOff x="0" y="0"/>
-          <a:chExt cx="0" cy="0"/>
-        </a:xfrm>
-      </p:grpSpPr>
-      <p:sp>
-        <p:nvSpPr>
-          <p:cNvPr id="2" name="Slide Image Placeholder 1"/>
-          <p:cNvSpPr>
-            <a:spLocks noGrp="1"/>
-          </p:cNvSpPr>
-          <p:nvPr>
-            <p:ph type="sldImg" idx="2"/>
-          </p:nvPr>
-        </p:nvSpPr>
-        <p:spPr/>
-      </p:sp>
-      <p:sp>
-        <p:nvSpPr>
-          <p:cNvPr id="3" name="Notes Placeholder 2"/>
-          <p:cNvSpPr>
-            <a:spLocks noGrp="1"/>
-          </p:cNvSpPr>
-          <p:nvPr>
-            <p:ph type="body" idx="3" sz="quarter"/>
-          </p:nvPr>
-        </p:nvSpPr>
-        <p:spPr/>
-        <p:txBody>
-          <a:bodyPr/>
-          <a:lstStyle/>
-          <a:p>
-            <a:r>
-              <a:t>Dejar 2 minutos para que lo escriban. La diapositiva siguiente muestra el resumen.</a:t>
-            </a:r>
-          </a:p>
-        </p:txBody>
-      </p:sp>
-      <p:sp>
-        <p:nvSpPr>
-          <p:cNvPr id="4" name="Slide Number Placeholder 3"/>
-          <p:cNvSpPr>
-            <a:spLocks noGrp="1"/>
-          </p:cNvSpPr>
-          <p:nvPr>
-            <p:ph type="sldNum" idx="5" sz="quarter"/>
-          </p:nvPr>
-        </p:nvSpPr>
-        <p:spPr/>
-      </p:sp>
-    </p:spTree>
-  </p:cSld>
-  <p:clrMapOvr>
-    <a:masterClrMapping/>
-  </p:clrMapOvr>
-</p:notes>
-</file>
-
-<file path=ppt/notesSlides/notesSlide6.xml><?xml version="1.0" encoding="utf-8"?>
-<p:notes xmlns:a="http://schemas.openxmlformats.org/drawingml/2006/main" xmlns:p="http://schemas.openxmlformats.org/presentationml/2006/main" xmlns:r="http://schemas.openxmlformats.org/officeDocument/2006/relationships">
-  <p:cSld>
-    <p:spTree>
-      <p:nvGrpSpPr>
-        <p:cNvPr id="1" name=""/>
-        <p:cNvGrpSpPr/>
-        <p:nvPr/>
-      </p:nvGrpSpPr>
-      <p:grpSpPr>
-        <a:xfrm>
-          <a:off x="0" y="0"/>
-          <a:ext cx="0" cy="0"/>
-          <a:chOff x="0" y="0"/>
-          <a:chExt cx="0" cy="0"/>
-        </a:xfrm>
-      </p:grpSpPr>
-      <p:sp>
-        <p:nvSpPr>
-          <p:cNvPr id="2" name="Slide Image Placeholder 1"/>
-          <p:cNvSpPr>
-            <a:spLocks noGrp="1"/>
-          </p:cNvSpPr>
-          <p:nvPr>
-            <p:ph type="sldImg" idx="2"/>
-          </p:nvPr>
-        </p:nvSpPr>
-        <p:spPr/>
-      </p:sp>
-      <p:sp>
-        <p:nvSpPr>
-          <p:cNvPr id="3" name="Notes Placeholder 2"/>
-          <p:cNvSpPr>
-            <a:spLocks noGrp="1"/>
-          </p:cNvSpPr>
-          <p:nvPr>
-            <p:ph type="body" idx="3" sz="quarter"/>
-          </p:nvPr>
-        </p:nvSpPr>
-        <p:spPr/>
-        <p:txBody>
-          <a:bodyPr/>
-          <a:lstStyle/>
-          <a:p>
-            <a:r>
-              <a:t>Buscar: «falacia pista falsa» · «red herring falacia en español»</a:t>
-            </a:r>
-          </a:p>
-        </p:txBody>
-      </p:sp>
-      <p:sp>
-        <p:nvSpPr>
-          <p:cNvPr id="4" name="Slide Number Placeholder 3"/>
-          <p:cNvSpPr>
-            <a:spLocks noGrp="1"/>
-          </p:cNvSpPr>
-          <p:nvPr>
-            <p:ph type="sldNum" idx="5" sz="quarter"/>
-          </p:nvPr>
-        </p:nvSpPr>
-        <p:spPr/>
-      </p:sp>
-    </p:spTree>
-  </p:cSld>
-  <p:clrMapOvr>
-    <a:masterClrMapping/>
-  </p:clrMapOvr>
-</p:notes>
 </file>
 
 <file path=ppt/slideLayouts/slideLayout1.xml><?xml version="1.0" encoding="utf-8"?>

--- a/curso/pptx/S17.pptx
+++ b/curso/pptx/S17.pptx
@@ -3718,7 +3718,7 @@
                 </a:solidFill>
                 <a:latin typeface="Fredoka"/>
               </a:rPr>
-              <a:t>Caso 2 · En el grupo de clase</a:t>
+              <a:t>Caso 2 · En el grupo del equipo</a:t>
             </a:r>
           </a:p>
         </p:txBody>
@@ -3800,7 +3800,7 @@
                 </a:solidFill>
                 <a:latin typeface="Nunito Sans"/>
               </a:rPr>
-              <a:t>Dylan: «Omar, ¿por qué subiste la foto de Leire sin preguntarle?». Omar: «¿Y qué me dices de las fotos que sube Aitor? ¡Esas sí que son malas!».</a:t>
+              <a:t>Una chica: «Oye, ¿por qué no viniste al entrenamiento?». Un chico: «¿Y qué me dices de otro compañero, que lleva un mes sin venir?».</a:t>
             </a:r>
           </a:p>
         </p:txBody>
@@ -3848,7 +3848,7 @@
                 </a:solidFill>
                 <a:latin typeface="Nunito Sans"/>
               </a:rPr>
-              <a:t>¿Qué se discute? Si Omar hizo bien al subir la foto.</a:t>
+              <a:t>¿Qué se discute? Por qué el chico no fue al entrenamiento.</a:t>
             </a:r>
           </a:p>
           <a:p>
@@ -3873,7 +3873,7 @@
                 </a:solidFill>
                 <a:latin typeface="Nunito Sans"/>
               </a:rPr>
-              <a:t>¿Qué hace Omar? Habla de las fotos de Aitor.</a:t>
+              <a:t>¿Qué hace el chico? Habla de las faltas de otro compañero.</a:t>
             </a:r>
           </a:p>
           <a:p>
@@ -3898,7 +3898,7 @@
                 </a:solidFill>
                 <a:latin typeface="Nunito Sans"/>
               </a:rPr>
-              <a:t>¿Eso responde? No: aunque Aitor lo haga peor, la pregunta era sobre Omar.</a:t>
+              <a:t>¿Eso responde? No: aunque ese otro compañero lo haga peor, la pregunta era sobre él.</a:t>
             </a:r>
           </a:p>
           <a:p>
@@ -3923,7 +3923,7 @@
                 </a:solidFill>
                 <a:latin typeface="Nunito Sans"/>
               </a:rPr>
-              <a:t>Conclusión: pista falsa. Hay que volver a la pregunta: ¿por qué la subiste?</a:t>
+              <a:t>Conclusión: pista falsa. Hay que volver a la pregunta: ¿por qué no viniste?</a:t>
             </a:r>
           </a:p>
         </p:txBody>
@@ -4109,7 +4109,7 @@
                 </a:solidFill>
                 <a:latin typeface="Nunito Sans"/>
               </a:rPr>
-              <a:t>Yasmin y Chen discuten qué serie ver. Chen: «Espera, eso luego. ¿Ves que sale humo de la cocina?».</a:t>
+              <a:t>Una chica y un chico discuten qué serie ver. El chico: «Espera, eso luego. ¿Ves que sale humo de la cocina?».</a:t>
             </a:r>
           </a:p>
         </p:txBody>
@@ -4881,7 +4881,7 @@
                 </a:solidFill>
                 <a:latin typeface="Nunito Sans"/>
               </a:rPr>
-              <a:t>La madre de Naiara: «¿Has hecho los deberes de Matemáticas?». Naiara: «La profe de Mates está de baja toda la semana».</a:t>
+              <a:t>La madre de una chica: «¿Has hecho los deberes de Matemáticas?». La chica: «La profe de Mates está de baja toda la semana».</a:t>
             </a:r>
           </a:p>
         </p:txBody>
@@ -6607,7 +6607,7 @@
                 </a:solidFill>
                 <a:latin typeface="Nunito Sans"/>
               </a:rPr>
-              <a:t>La madre de Naiara: «¿Has hecho los deberes?». Naiara: «¿Sabías que el Athletic ha fichado a un delantero nuevo?».</a:t>
+              <a:t>La madre de una chica: «¿Has hecho los deberes?». La chica: «¿Sabías que el Athletic ha fichado a un delantero nuevo?».</a:t>
             </a:r>
           </a:p>
         </p:txBody>
@@ -6646,7 +6646,7 @@
                 </a:solidFill>
                 <a:latin typeface="Nunito Sans"/>
               </a:rPr>
-              <a:t>¿Ha contestado Naiara? ¿Por qué habrá cambiado de tema?</a:t>
+              <a:t>¿Ha contestado la chica? ¿Por qué habrá cambiado de tema?</a:t>
             </a:r>
           </a:p>
         </p:txBody>
@@ -7639,7 +7639,7 @@
                 </a:solidFill>
                 <a:latin typeface="Nunito Sans"/>
               </a:rPr>
-              <a:t>La madre de Naiara: «¿Has hecho los deberes?». Naiara: «¿Sabías que el Athletic ha fichado a un delantero nuevo?».</a:t>
+              <a:t>La madre de una chica: «¿Has hecho los deberes?». La chica: «¿Sabías que el Athletic ha fichado a un delantero nuevo?».</a:t>
             </a:r>
           </a:p>
         </p:txBody>

--- a/curso/pptx/S17.pptx
+++ b/curso/pptx/S17.pptx
@@ -23,6 +23,7 @@
     <p:sldId id="271" r:id="rId23"/>
     <p:sldId id="272" r:id="rId24"/>
     <p:sldId id="273" r:id="rId25"/>
+    <p:sldId id="274" r:id="rId26"/>
   </p:sldIdLst>
   <p:sldSz cx="12192000" cy="6858000" type="screen4x3"/>
   <p:notesSz cx="6858000" cy="9144000"/>
@@ -3536,7 +3537,7 @@
                 </a:solidFill>
                 <a:latin typeface="Nunito Sans"/>
               </a:rPr>
-              <a:t>PENSAMIENTO CRÍTICO · SESIÓN 17 · UNIDAD 3 · FALACIAS I: ATACAR, DESVIAR, EMOCIONAR</a:t>
+              <a:t>PENSAMIENTO CRÍTICO · SESIÓN 17 · UNIDAD 3 · ARGUMENTAR</a:t>
             </a:r>
           </a:p>
         </p:txBody>
@@ -3575,7 +3576,7 @@
                 </a:solidFill>
                 <a:latin typeface="Fredoka"/>
               </a:rPr>
-              <a:t>La pista falsa</a:t>
+              <a:t>Ejemplos, contraejemplos y analogías</a:t>
             </a:r>
           </a:p>
         </p:txBody>
@@ -3614,7 +3615,7 @@
                 </a:solidFill>
                 <a:latin typeface="Nunito Sans"/>
               </a:rPr>
-              <a:t>La pista falsa cambia de tema para no responder, y la discusión acaba lejos de la pregunta.</a:t>
+              <a:t>Los ejemplos apoyan una idea, un solo contraejemplo basta para tumbar un «todos» y una analogía compara dos cosas parecidas.</a:t>
             </a:r>
           </a:p>
         </p:txBody>
@@ -3718,7 +3719,7 @@
                 </a:solidFill>
                 <a:latin typeface="Fredoka"/>
               </a:rPr>
-              <a:t>Caso 2 · En el grupo del equipo</a:t>
+              <a:t>Caso 1 · Un contraejemplo</a:t>
             </a:r>
           </a:p>
         </p:txBody>
@@ -3800,7 +3801,7 @@
                 </a:solidFill>
                 <a:latin typeface="Nunito Sans"/>
               </a:rPr>
-              <a:t>Una chica: «Oye, ¿por qué no viniste al entrenamiento?». Un chico: «¿Y qué me dices de otro compañero, que lleva un mes sin venir?».</a:t>
+              <a:t>Un chico: «Nadie de mi clase lee libros por gusto». Una chica: «Yo he leído tres este verano, y nadie me obligó».</a:t>
             </a:r>
           </a:p>
         </p:txBody>
@@ -3848,7 +3849,7 @@
                 </a:solidFill>
                 <a:latin typeface="Nunito Sans"/>
               </a:rPr>
-              <a:t>¿Qué se discute? Por qué el chico no fue al entrenamiento.</a:t>
+              <a:t>La frase del chico es general: «nadie».</a:t>
             </a:r>
           </a:p>
           <a:p>
@@ -3873,7 +3874,25 @@
                 </a:solidFill>
                 <a:latin typeface="Nunito Sans"/>
               </a:rPr>
-              <a:t>¿Qué hace el chico? Habla de las faltas de otro compañero.</a:t>
+              <a:t>La chica es un caso en contra: un </a:t>
+            </a:r>
+            <a:r>
+              <a:rPr sz="2400" b="1">
+                <a:solidFill>
+                  <a:srgbClr val="1F2A44"/>
+                </a:solidFill>
+                <a:latin typeface="Nunito Sans"/>
+              </a:rPr>
+              <a:t>contraejemplo</a:t>
+            </a:r>
+            <a:r>
+              <a:rPr sz="2400" b="0">
+                <a:solidFill>
+                  <a:srgbClr val="1F2A44"/>
+                </a:solidFill>
+                <a:latin typeface="Nunito Sans"/>
+              </a:rPr>
+              <a:t>.</a:t>
             </a:r>
           </a:p>
           <a:p>
@@ -3898,7 +3917,7 @@
                 </a:solidFill>
                 <a:latin typeface="Nunito Sans"/>
               </a:rPr>
-              <a:t>¿Eso responde? No: aunque ese otro compañero lo haga peor, la pregunta era sobre él.</a:t>
+              <a:t>No hace falta más: basta uno.</a:t>
             </a:r>
           </a:p>
           <a:p>
@@ -3923,7 +3942,7 @@
                 </a:solidFill>
                 <a:latin typeface="Nunito Sans"/>
               </a:rPr>
-              <a:t>Conclusión: pista falsa. Hay que volver a la pregunta: ¿por qué no viniste?</a:t>
+              <a:t>Conclusión: la frase del chico es falsa. Podría decir «pocos», pero no «nadie».</a:t>
             </a:r>
           </a:p>
         </p:txBody>
@@ -4027,7 +4046,7 @@
                 </a:solidFill>
                 <a:latin typeface="Fredoka"/>
               </a:rPr>
-              <a:t>Caso 3 · Cambiar de tema sin trampa</a:t>
+              <a:t>Caso 2 · Muchos ejemplos no bastan</a:t>
             </a:r>
           </a:p>
         </p:txBody>
@@ -4109,7 +4128,7 @@
                 </a:solidFill>
                 <a:latin typeface="Nunito Sans"/>
               </a:rPr>
-              <a:t>Una chica y un chico discuten qué serie ver. El chico: «Espera, eso luego. ¿Ves que sale humo de la cocina?».</a:t>
+              <a:t>Un chico: «Todos los youtubers son ricos: mira estos cinco, que tienen casas enormes».</a:t>
             </a:r>
           </a:p>
         </p:txBody>
@@ -4157,7 +4176,25 @@
                 </a:solidFill>
                 <a:latin typeface="Nunito Sans"/>
               </a:rPr>
-              <a:t>¿Cambia de tema? Sí.</a:t>
+              <a:t>Ese chico da cinco </a:t>
+            </a:r>
+            <a:r>
+              <a:rPr sz="2400" b="1">
+                <a:solidFill>
+                  <a:srgbClr val="1F2A44"/>
+                </a:solidFill>
+                <a:latin typeface="Nunito Sans"/>
+              </a:rPr>
+              <a:t>ejemplos</a:t>
+            </a:r>
+            <a:r>
+              <a:rPr sz="2400" b="0">
+                <a:solidFill>
+                  <a:srgbClr val="1F2A44"/>
+                </a:solidFill>
+                <a:latin typeface="Nunito Sans"/>
+              </a:rPr>
+              <a:t>. Apoyan su idea, pero no la demuestran.</a:t>
             </a:r>
           </a:p>
           <a:p>
@@ -4182,7 +4219,7 @@
                 </a:solidFill>
                 <a:latin typeface="Nunito Sans"/>
               </a:rPr>
-              <a:t>¿Es para no responder? No: hay algo urgente y lo dice claro.</a:t>
+              <a:t>Hay muchísimos youtubers con pocos seguidores que no ganan casi nada.</a:t>
             </a:r>
           </a:p>
           <a:p>
@@ -4207,7 +4244,7 @@
                 </a:solidFill>
                 <a:latin typeface="Nunito Sans"/>
               </a:rPr>
-              <a:t>Después pueden volver a la serie.</a:t>
+              <a:t>Cada uno de ellos es un contraejemplo.</a:t>
             </a:r>
           </a:p>
           <a:p>
@@ -4232,7 +4269,7 @@
                 </a:solidFill>
                 <a:latin typeface="Nunito Sans"/>
               </a:rPr>
-              <a:t>Conclusión: no es pista falsa. Cambiar de tema es legítimo si no sirve para esquivar.</a:t>
+              <a:t>Conclusión: cinco ejemplos no demuestran un «todos». Un contraejemplo sí lo tumba.</a:t>
             </a:r>
           </a:p>
         </p:txBody>
@@ -4251,7 +4288,7 @@
     <p:bg>
       <p:bgPr>
         <a:solidFill>
-          <a:srgbClr val="1F2A44"/>
+          <a:srgbClr val="FBF7EF"/>
         </a:solidFill>
         <a:effectLst/>
       </p:bgPr>
@@ -4271,8 +4308,8 @@
         </p:nvSpPr>
         <p:spPr>
           <a:xfrm>
-            <a:off x="640000" y="2300000"/>
-            <a:ext cx="10912000" cy="500000"/>
+            <a:off x="640000" y="380000"/>
+            <a:ext cx="10912000" cy="420000"/>
           </a:xfrm>
           <a:prstGeom prst="rect">
             <a:avLst/>
@@ -4287,17 +4324,17 @@
           <a:p>
             <a:pPr>
               <a:spcAft>
-                <a:spcPts val="810"/>
-              </a:spcAft>
-            </a:pPr>
-            <a:r>
-              <a:rPr sz="1800" b="1">
-                <a:solidFill>
-                  <a:srgbClr val="F4B183"/>
-                </a:solidFill>
-                <a:latin typeface="Nunito Sans"/>
-              </a:rPr>
-              <a:t>BLOQUE 3</a:t>
+                <a:spcPts val="630"/>
+              </a:spcAft>
+            </a:pPr>
+            <a:r>
+              <a:rPr sz="1400" b="1">
+                <a:solidFill>
+                  <a:srgbClr val="E8793A"/>
+                </a:solidFill>
+                <a:latin typeface="Nunito Sans"/>
+              </a:rPr>
+              <a:t>BLOQUE 2 · CASOS RESUELTOS</a:t>
             </a:r>
           </a:p>
         </p:txBody>
@@ -4310,7 +4347,7 @@
         </p:nvSpPr>
         <p:spPr>
           <a:xfrm>
-            <a:off x="640000" y="2800000"/>
+            <a:off x="640000" y="760000"/>
             <a:ext cx="10912000" cy="800000"/>
           </a:xfrm>
           <a:prstGeom prst="rect">
@@ -4326,17 +4363,240 @@
           <a:p>
             <a:pPr>
               <a:spcAft>
-                <a:spcPts val="2160"/>
-              </a:spcAft>
-            </a:pPr>
-            <a:r>
-              <a:rPr sz="4800" b="1">
-                <a:solidFill>
-                  <a:srgbClr val="FBF7EF"/>
+                <a:spcPts val="1710"/>
+              </a:spcAft>
+            </a:pPr>
+            <a:r>
+              <a:rPr sz="3800" b="1">
+                <a:solidFill>
+                  <a:srgbClr val="1F2A44"/>
                 </a:solidFill>
                 <a:latin typeface="Fredoka"/>
               </a:rPr>
-              <a:t>Tres formas de no responder</a:t>
+              <a:t>Caso 3 · Una mala analogía</a:t>
+            </a:r>
+          </a:p>
+        </p:txBody>
+      </p:sp>
+      <p:sp>
+        <p:nvSpPr>
+          <p:cNvPr id="4" name="Rectangle 3"/>
+          <p:cNvSpPr/>
+          <p:nvPr/>
+        </p:nvSpPr>
+        <p:spPr>
+          <a:xfrm>
+            <a:off x="640000" y="1600000"/>
+            <a:ext cx="10912000" cy="1100000"/>
+          </a:xfrm>
+          <a:prstGeom prst="rect">
+            <a:avLst/>
+          </a:prstGeom>
+          <a:solidFill>
+            <a:srgbClr val="FFFFFF"/>
+          </a:solidFill>
+          <a:ln>
+            <a:noFill/>
+          </a:ln>
+        </p:spPr>
+        <p:style>
+          <a:lnRef idx="1">
+            <a:schemeClr val="accent1"/>
+          </a:lnRef>
+          <a:fillRef idx="3">
+            <a:schemeClr val="accent1"/>
+          </a:fillRef>
+          <a:effectRef idx="2">
+            <a:schemeClr val="accent1"/>
+          </a:effectRef>
+          <a:fontRef idx="minor">
+            <a:schemeClr val="lt1"/>
+          </a:fontRef>
+        </p:style>
+        <p:txBody>
+          <a:bodyPr rtlCol="0" anchor="ctr"/>
+          <a:lstStyle/>
+          <a:p>
+            <a:pPr algn="ctr"/>
+          </a:p>
+        </p:txBody>
+      </p:sp>
+      <p:sp>
+        <p:nvSpPr>
+          <p:cNvPr id="5" name="TextBox 4"/>
+          <p:cNvSpPr txBox="1"/>
+          <p:nvPr/>
+        </p:nvSpPr>
+        <p:spPr>
+          <a:xfrm>
+            <a:off x="840000" y="1650000"/>
+            <a:ext cx="10512000" cy="1000000"/>
+          </a:xfrm>
+          <a:prstGeom prst="rect">
+            <a:avLst/>
+          </a:prstGeom>
+          <a:noFill/>
+        </p:spPr>
+        <p:txBody>
+          <a:bodyPr wrap="square" anchor="ctr">
+            <a:spAutoFit/>
+          </a:bodyPr>
+          <a:lstStyle/>
+          <a:p>
+            <a:pPr>
+              <a:spcAft>
+                <a:spcPts val="1170"/>
+              </a:spcAft>
+            </a:pPr>
+            <a:r>
+              <a:rPr sz="2600" b="1">
+                <a:solidFill>
+                  <a:srgbClr val="1F2A44"/>
+                </a:solidFill>
+                <a:latin typeface="Nunito Sans"/>
+              </a:rPr>
+              <a:t>«Deberíamos poder mirar los apuntes en los exámenes: los médicos miran las radiografías cuando operan.»</a:t>
+            </a:r>
+          </a:p>
+        </p:txBody>
+      </p:sp>
+      <p:sp>
+        <p:nvSpPr>
+          <p:cNvPr id="6" name="TextBox 5"/>
+          <p:cNvSpPr txBox="1"/>
+          <p:nvPr/>
+        </p:nvSpPr>
+        <p:spPr>
+          <a:xfrm>
+            <a:off x="640000" y="2900000"/>
+            <a:ext cx="10912000" cy="3500000"/>
+          </a:xfrm>
+          <a:prstGeom prst="rect">
+            <a:avLst/>
+          </a:prstGeom>
+          <a:noFill/>
+        </p:spPr>
+        <p:txBody>
+          <a:bodyPr wrap="square">
+            <a:spAutoFit/>
+          </a:bodyPr>
+          <a:lstStyle/>
+          <a:p>
+            <a:pPr>
+              <a:spcAft>
+                <a:spcPts val="1080"/>
+              </a:spcAft>
+            </a:pPr>
+            <a:r>
+              <a:rPr sz="2400" b="1">
+                <a:solidFill>
+                  <a:srgbClr val="E8793A"/>
+                </a:solidFill>
+                <a:latin typeface="Nunito Sans"/>
+              </a:rPr>
+              <a:t>1. </a:t>
+            </a:r>
+            <a:r>
+              <a:rPr sz="2400" b="0">
+                <a:solidFill>
+                  <a:srgbClr val="1F2A44"/>
+                </a:solidFill>
+                <a:latin typeface="Nunito Sans"/>
+              </a:rPr>
+              <a:t>Compara a un alumno en un examen con un médico trabajando.</a:t>
+            </a:r>
+          </a:p>
+          <a:p>
+            <a:pPr>
+              <a:spcAft>
+                <a:spcPts val="1080"/>
+              </a:spcAft>
+            </a:pPr>
+            <a:r>
+              <a:rPr sz="2400" b="1">
+                <a:solidFill>
+                  <a:srgbClr val="E8793A"/>
+                </a:solidFill>
+                <a:latin typeface="Nunito Sans"/>
+              </a:rPr>
+              <a:t>2. </a:t>
+            </a:r>
+            <a:r>
+              <a:rPr sz="2400" b="0">
+                <a:solidFill>
+                  <a:srgbClr val="1F2A44"/>
+                </a:solidFill>
+                <a:latin typeface="Nunito Sans"/>
+              </a:rPr>
+              <a:t>¿Se parecen en lo que importa? No: el examen sirve para ver qué ha aprendido el alumno.</a:t>
+            </a:r>
+          </a:p>
+          <a:p>
+            <a:pPr>
+              <a:spcAft>
+                <a:spcPts val="1080"/>
+              </a:spcAft>
+            </a:pPr>
+            <a:r>
+              <a:rPr sz="2400" b="1">
+                <a:solidFill>
+                  <a:srgbClr val="E8793A"/>
+                </a:solidFill>
+                <a:latin typeface="Nunito Sans"/>
+              </a:rPr>
+              <a:t>3. </a:t>
+            </a:r>
+            <a:r>
+              <a:rPr sz="2400" b="0">
+                <a:solidFill>
+                  <a:srgbClr val="1F2A44"/>
+                </a:solidFill>
+                <a:latin typeface="Nunito Sans"/>
+              </a:rPr>
+              <a:t>Al médico no le están examinando: ya aprendió antes.</a:t>
+            </a:r>
+          </a:p>
+          <a:p>
+            <a:pPr>
+              <a:spcAft>
+                <a:spcPts val="1080"/>
+              </a:spcAft>
+            </a:pPr>
+            <a:r>
+              <a:rPr sz="2400" b="1">
+                <a:solidFill>
+                  <a:srgbClr val="E8793A"/>
+                </a:solidFill>
+                <a:latin typeface="Nunito Sans"/>
+              </a:rPr>
+              <a:t>4. </a:t>
+            </a:r>
+            <a:r>
+              <a:rPr sz="2400" b="0">
+                <a:solidFill>
+                  <a:srgbClr val="1F2A44"/>
+                </a:solidFill>
+                <a:latin typeface="Nunito Sans"/>
+              </a:rPr>
+              <a:t>Conclusión: es una </a:t>
+            </a:r>
+            <a:r>
+              <a:rPr sz="2400" b="1">
+                <a:solidFill>
+                  <a:srgbClr val="1F2A44"/>
+                </a:solidFill>
+                <a:latin typeface="Nunito Sans"/>
+              </a:rPr>
+              <a:t>mala analogía</a:t>
+            </a:r>
+            <a:r>
+              <a:rPr sz="2400" b="0">
+                <a:solidFill>
+                  <a:srgbClr val="1F2A44"/>
+                </a:solidFill>
+                <a:latin typeface="Nunito Sans"/>
+              </a:rPr>
+              <a:t>: se parecen en algo que no importa para la conclusión.</a:t>
             </a:r>
           </a:p>
         </p:txBody>
@@ -4401,7 +4661,7 @@
                 </a:solidFill>
                 <a:latin typeface="Nunito Sans"/>
               </a:rPr>
-              <a:t>BLOQUE 3 · TRES FORMAS DE NO RESPONDER</a:t>
+              <a:t>BLOQUE 2 · CASOS RESUELTOS</a:t>
             </a:r>
           </a:p>
         </p:txBody>
@@ -4440,266 +4700,209 @@
                 </a:solidFill>
                 <a:latin typeface="Fredoka"/>
               </a:rPr>
-              <a:t>Lo que llevamos de unidad</a:t>
-            </a:r>
-          </a:p>
-        </p:txBody>
-      </p:sp>
-      <p:graphicFrame>
-        <p:nvGraphicFramePr>
-          <p:cNvPr id="4" name="Table 3"/>
-          <p:cNvGraphicFramePr>
-            <a:graphicFrameLocks noGrp="1"/>
-          </p:cNvGraphicFramePr>
+              <a:t>Caso 4 · Una buena analogía</a:t>
+            </a:r>
+          </a:p>
+        </p:txBody>
+      </p:sp>
+      <p:sp>
+        <p:nvSpPr>
+          <p:cNvPr id="4" name="Rectangle 3"/>
+          <p:cNvSpPr/>
           <p:nvPr/>
-        </p:nvGraphicFramePr>
-        <p:xfrm>
-          <a:off x="640000" y="1700000"/>
-          <a:ext cx="10912000" cy="2400000"/>
-        </p:xfrm>
-        <a:graphic>
-          <a:graphicData uri="http://schemas.openxmlformats.org/drawingml/2006/table">
-            <a:tbl>
-              <a:tblPr firstRow="1" bandRow="1">
-                <a:tableStyleId>{5C22544A-7EE6-4342-B048-85BDC9FD1C3A}</a:tableStyleId>
-              </a:tblPr>
-              <a:tblGrid>
-                <a:gridCol w="5456000"/>
-                <a:gridCol w="5456000"/>
-              </a:tblGrid>
-              <a:tr h="600000">
-                <a:tc>
-                  <a:txBody>
-                    <a:bodyPr/>
-                    <a:lstStyle/>
-                    <a:p>
-                      <a:r>
-                        <a:rPr sz="2000" b="1">
-                          <a:solidFill>
-                            <a:srgbClr val="FBF7EF"/>
-                          </a:solidFill>
-                          <a:latin typeface="Fredoka"/>
-                        </a:rPr>
-                        <a:t>Falacia</a:t>
-                      </a:r>
-                    </a:p>
-                  </a:txBody>
-                  <a:tcPr>
-                    <a:solidFill>
-                      <a:srgbClr val="1F2A44"/>
-                    </a:solidFill>
-                  </a:tcPr>
-                </a:tc>
-                <a:tc>
-                  <a:txBody>
-                    <a:bodyPr/>
-                    <a:lstStyle/>
-                    <a:p>
-                      <a:r>
-                        <a:rPr sz="2000" b="1">
-                          <a:solidFill>
-                            <a:srgbClr val="FBF7EF"/>
-                          </a:solidFill>
-                          <a:latin typeface="Fredoka"/>
-                        </a:rPr>
-                        <a:t>Qué hace</a:t>
-                      </a:r>
-                    </a:p>
-                  </a:txBody>
-                  <a:tcPr>
-                    <a:solidFill>
-                      <a:srgbClr val="1F2A44"/>
-                    </a:solidFill>
-                  </a:tcPr>
-                </a:tc>
-              </a:tr>
-              <a:tr h="600000">
-                <a:tc>
-                  <a:txBody>
-                    <a:bodyPr/>
-                    <a:lstStyle/>
-                    <a:p>
-                      <a:r>
-                        <a:rPr sz="2000" b="0">
-                          <a:solidFill>
-                            <a:srgbClr val="1F2A44"/>
-                          </a:solidFill>
-                          <a:latin typeface="Nunito Sans"/>
-                        </a:rPr>
-                        <a:t>Ataque a la persona (sesión 14)</a:t>
-                      </a:r>
-                    </a:p>
-                  </a:txBody>
-                  <a:tcPr>
-                    <a:solidFill>
-                      <a:srgbClr val="FFFFFF"/>
-                    </a:solidFill>
-                  </a:tcPr>
-                </a:tc>
-                <a:tc>
-                  <a:txBody>
-                    <a:bodyPr/>
-                    <a:lstStyle/>
-                    <a:p>
-                      <a:r>
-                        <a:rPr sz="2000" b="0">
-                          <a:solidFill>
-                            <a:srgbClr val="1F2A44"/>
-                          </a:solidFill>
-                          <a:latin typeface="Nunito Sans"/>
-                        </a:rPr>
-                        <a:t>Cambia el tema </a:t>
-                      </a:r>
-                      <a:r>
-                        <a:rPr sz="2000" b="1">
-                          <a:solidFill>
-                            <a:srgbClr val="1F2A44"/>
-                          </a:solidFill>
-                          <a:latin typeface="Nunito Sans"/>
-                        </a:rPr>
-                        <a:t>a la persona</a:t>
-                      </a:r>
-                    </a:p>
-                  </a:txBody>
-                  <a:tcPr>
-                    <a:solidFill>
-                      <a:srgbClr val="FFFFFF"/>
-                    </a:solidFill>
-                  </a:tcPr>
-                </a:tc>
-              </a:tr>
-              <a:tr h="600000">
-                <a:tc>
-                  <a:txBody>
-                    <a:bodyPr/>
-                    <a:lstStyle/>
-                    <a:p>
-                      <a:r>
-                        <a:rPr sz="2000" b="0">
-                          <a:solidFill>
-                            <a:srgbClr val="1F2A44"/>
-                          </a:solidFill>
-                          <a:latin typeface="Nunito Sans"/>
-                        </a:rPr>
-                        <a:t>Hombre de paja (sesión 15)</a:t>
-                      </a:r>
-                    </a:p>
-                  </a:txBody>
-                  <a:tcPr>
-                    <a:solidFill>
-                      <a:srgbClr val="EAF0F7"/>
-                    </a:solidFill>
-                  </a:tcPr>
-                </a:tc>
-                <a:tc>
-                  <a:txBody>
-                    <a:bodyPr/>
-                    <a:lstStyle/>
-                    <a:p>
-                      <a:r>
-                        <a:rPr sz="2000" b="0">
-                          <a:solidFill>
-                            <a:srgbClr val="1F2A44"/>
-                          </a:solidFill>
-                          <a:latin typeface="Nunito Sans"/>
-                        </a:rPr>
-                        <a:t>Cambia </a:t>
-                      </a:r>
-                      <a:r>
-                        <a:rPr sz="2000" b="1">
-                          <a:solidFill>
-                            <a:srgbClr val="1F2A44"/>
-                          </a:solidFill>
-                          <a:latin typeface="Nunito Sans"/>
-                        </a:rPr>
-                        <a:t>la idea</a:t>
-                      </a:r>
-                      <a:r>
-                        <a:rPr sz="2000" b="0">
-                          <a:solidFill>
-                            <a:srgbClr val="1F2A44"/>
-                          </a:solidFill>
-                          <a:latin typeface="Nunito Sans"/>
-                        </a:rPr>
-                        <a:t> por otra peor</a:t>
-                      </a:r>
-                    </a:p>
-                  </a:txBody>
-                  <a:tcPr>
-                    <a:solidFill>
-                      <a:srgbClr val="EAF0F7"/>
-                    </a:solidFill>
-                  </a:tcPr>
-                </a:tc>
-              </a:tr>
-              <a:tr h="600000">
-                <a:tc>
-                  <a:txBody>
-                    <a:bodyPr/>
-                    <a:lstStyle/>
-                    <a:p>
-                      <a:r>
-                        <a:rPr sz="2000" b="0">
-                          <a:solidFill>
-                            <a:srgbClr val="1F2A44"/>
-                          </a:solidFill>
-                          <a:latin typeface="Nunito Sans"/>
-                        </a:rPr>
-                        <a:t>Pista falsa</a:t>
-                      </a:r>
-                    </a:p>
-                  </a:txBody>
-                  <a:tcPr>
-                    <a:solidFill>
-                      <a:srgbClr val="FFFFFF"/>
-                    </a:solidFill>
-                  </a:tcPr>
-                </a:tc>
-                <a:tc>
-                  <a:txBody>
-                    <a:bodyPr/>
-                    <a:lstStyle/>
-                    <a:p>
-                      <a:r>
-                        <a:rPr sz="2000" b="0">
-                          <a:solidFill>
-                            <a:srgbClr val="1F2A44"/>
-                          </a:solidFill>
-                          <a:latin typeface="Nunito Sans"/>
-                        </a:rPr>
-                        <a:t>Cambia </a:t>
-                      </a:r>
-                      <a:r>
-                        <a:rPr sz="2000" b="1">
-                          <a:solidFill>
-                            <a:srgbClr val="1F2A44"/>
-                          </a:solidFill>
-                          <a:latin typeface="Nunito Sans"/>
-                        </a:rPr>
-                        <a:t>de tema</a:t>
-                      </a:r>
-                      <a:r>
-                        <a:rPr sz="2000" b="0">
-                          <a:solidFill>
-                            <a:srgbClr val="1F2A44"/>
-                          </a:solidFill>
-                          <a:latin typeface="Nunito Sans"/>
-                        </a:rPr>
-                        <a:t> del todo</a:t>
-                      </a:r>
-                    </a:p>
-                  </a:txBody>
-                  <a:tcPr>
-                    <a:solidFill>
-                      <a:srgbClr val="FFFFFF"/>
-                    </a:solidFill>
-                  </a:tcPr>
-                </a:tc>
-              </a:tr>
-            </a:tbl>
-          </a:graphicData>
-        </a:graphic>
-      </p:graphicFrame>
+        </p:nvSpPr>
+        <p:spPr>
+          <a:xfrm>
+            <a:off x="640000" y="1600000"/>
+            <a:ext cx="10912000" cy="1100000"/>
+          </a:xfrm>
+          <a:prstGeom prst="rect">
+            <a:avLst/>
+          </a:prstGeom>
+          <a:solidFill>
+            <a:srgbClr val="FFFFFF"/>
+          </a:solidFill>
+          <a:ln>
+            <a:noFill/>
+          </a:ln>
+        </p:spPr>
+        <p:style>
+          <a:lnRef idx="1">
+            <a:schemeClr val="accent1"/>
+          </a:lnRef>
+          <a:fillRef idx="3">
+            <a:schemeClr val="accent1"/>
+          </a:fillRef>
+          <a:effectRef idx="2">
+            <a:schemeClr val="accent1"/>
+          </a:effectRef>
+          <a:fontRef idx="minor">
+            <a:schemeClr val="lt1"/>
+          </a:fontRef>
+        </p:style>
+        <p:txBody>
+          <a:bodyPr rtlCol="0" anchor="ctr"/>
+          <a:lstStyle/>
+          <a:p>
+            <a:pPr algn="ctr"/>
+          </a:p>
+        </p:txBody>
+      </p:sp>
+      <p:sp>
+        <p:nvSpPr>
+          <p:cNvPr id="5" name="TextBox 4"/>
+          <p:cNvSpPr txBox="1"/>
+          <p:nvPr/>
+        </p:nvSpPr>
+        <p:spPr>
+          <a:xfrm>
+            <a:off x="840000" y="1650000"/>
+            <a:ext cx="10512000" cy="1000000"/>
+          </a:xfrm>
+          <a:prstGeom prst="rect">
+            <a:avLst/>
+          </a:prstGeom>
+          <a:noFill/>
+        </p:spPr>
+        <p:txBody>
+          <a:bodyPr wrap="square" anchor="ctr">
+            <a:spAutoFit/>
+          </a:bodyPr>
+          <a:lstStyle/>
+          <a:p>
+            <a:pPr>
+              <a:spcAft>
+                <a:spcPts val="1170"/>
+              </a:spcAft>
+            </a:pPr>
+            <a:r>
+              <a:rPr sz="2600" b="1">
+                <a:solidFill>
+                  <a:srgbClr val="1F2A44"/>
+                </a:solidFill>
+                <a:latin typeface="Nunito Sans"/>
+              </a:rPr>
+              <a:t>«Igual que no dejas la puerta de casa abierta al salir, no dejes el móvil sin contraseña.»</a:t>
+            </a:r>
+          </a:p>
+        </p:txBody>
+      </p:sp>
+      <p:sp>
+        <p:nvSpPr>
+          <p:cNvPr id="6" name="TextBox 5"/>
+          <p:cNvSpPr txBox="1"/>
+          <p:nvPr/>
+        </p:nvSpPr>
+        <p:spPr>
+          <a:xfrm>
+            <a:off x="640000" y="2900000"/>
+            <a:ext cx="10912000" cy="3500000"/>
+          </a:xfrm>
+          <a:prstGeom prst="rect">
+            <a:avLst/>
+          </a:prstGeom>
+          <a:noFill/>
+        </p:spPr>
+        <p:txBody>
+          <a:bodyPr wrap="square">
+            <a:spAutoFit/>
+          </a:bodyPr>
+          <a:lstStyle/>
+          <a:p>
+            <a:pPr>
+              <a:spcAft>
+                <a:spcPts val="1080"/>
+              </a:spcAft>
+            </a:pPr>
+            <a:r>
+              <a:rPr sz="2400" b="1">
+                <a:solidFill>
+                  <a:srgbClr val="E8793A"/>
+                </a:solidFill>
+                <a:latin typeface="Nunito Sans"/>
+              </a:rPr>
+              <a:t>1. </a:t>
+            </a:r>
+            <a:r>
+              <a:rPr sz="2400" b="0">
+                <a:solidFill>
+                  <a:srgbClr val="1F2A44"/>
+                </a:solidFill>
+                <a:latin typeface="Nunito Sans"/>
+              </a:rPr>
+              <a:t>Compara la casa y el móvil.</a:t>
+            </a:r>
+          </a:p>
+          <a:p>
+            <a:pPr>
+              <a:spcAft>
+                <a:spcPts val="1080"/>
+              </a:spcAft>
+            </a:pPr>
+            <a:r>
+              <a:rPr sz="2400" b="1">
+                <a:solidFill>
+                  <a:srgbClr val="E8793A"/>
+                </a:solidFill>
+                <a:latin typeface="Nunito Sans"/>
+              </a:rPr>
+              <a:t>2. </a:t>
+            </a:r>
+            <a:r>
+              <a:rPr sz="2400" b="0">
+                <a:solidFill>
+                  <a:srgbClr val="1F2A44"/>
+                </a:solidFill>
+                <a:latin typeface="Nunito Sans"/>
+              </a:rPr>
+              <a:t>¿Se parecen en lo que importa? Sí: los dos guardan cosas privadas que otros podrían coger.</a:t>
+            </a:r>
+          </a:p>
+          <a:p>
+            <a:pPr>
+              <a:spcAft>
+                <a:spcPts val="1080"/>
+              </a:spcAft>
+            </a:pPr>
+            <a:r>
+              <a:rPr sz="2400" b="1">
+                <a:solidFill>
+                  <a:srgbClr val="E8793A"/>
+                </a:solidFill>
+                <a:latin typeface="Nunito Sans"/>
+              </a:rPr>
+              <a:t>3. </a:t>
+            </a:r>
+            <a:r>
+              <a:rPr sz="2400" b="0">
+                <a:solidFill>
+                  <a:srgbClr val="1F2A44"/>
+                </a:solidFill>
+                <a:latin typeface="Nunito Sans"/>
+              </a:rPr>
+              <a:t>Conclusión: es una </a:t>
+            </a:r>
+            <a:r>
+              <a:rPr sz="2400" b="1">
+                <a:solidFill>
+                  <a:srgbClr val="1F2A44"/>
+                </a:solidFill>
+                <a:latin typeface="Nunito Sans"/>
+              </a:rPr>
+              <a:t>buena analogía</a:t>
+            </a:r>
+            <a:r>
+              <a:rPr sz="2400" b="0">
+                <a:solidFill>
+                  <a:srgbClr val="1F2A44"/>
+                </a:solidFill>
+                <a:latin typeface="Nunito Sans"/>
+              </a:rPr>
+              <a:t>: se parecen en lo importante para la conclusión.</a:t>
+            </a:r>
+          </a:p>
+        </p:txBody>
+      </p:sp>
     </p:spTree>
   </p:cSld>
   <p:clrMapOvr>
@@ -4709,6 +4912,110 @@
 </file>
 
 <file path=ppt/slides/slide14.xml><?xml version="1.0" encoding="utf-8"?>
+<p:sld xmlns:a="http://schemas.openxmlformats.org/drawingml/2006/main" xmlns:p="http://schemas.openxmlformats.org/presentationml/2006/main" xmlns:r="http://schemas.openxmlformats.org/officeDocument/2006/relationships">
+  <p:cSld>
+    <p:bg>
+      <p:bgPr>
+        <a:solidFill>
+          <a:srgbClr val="1F2A44"/>
+        </a:solidFill>
+        <a:effectLst/>
+      </p:bgPr>
+    </p:bg>
+    <p:spTree>
+      <p:nvGrpSpPr>
+        <p:cNvPr id="1" name=""/>
+        <p:cNvGrpSpPr/>
+        <p:nvPr/>
+      </p:nvGrpSpPr>
+      <p:grpSpPr/>
+      <p:sp>
+        <p:nvSpPr>
+          <p:cNvPr id="2" name="TextBox 1"/>
+          <p:cNvSpPr txBox="1"/>
+          <p:nvPr/>
+        </p:nvSpPr>
+        <p:spPr>
+          <a:xfrm>
+            <a:off x="640000" y="2300000"/>
+            <a:ext cx="10912000" cy="500000"/>
+          </a:xfrm>
+          <a:prstGeom prst="rect">
+            <a:avLst/>
+          </a:prstGeom>
+          <a:noFill/>
+        </p:spPr>
+        <p:txBody>
+          <a:bodyPr wrap="square">
+            <a:spAutoFit/>
+          </a:bodyPr>
+          <a:lstStyle/>
+          <a:p>
+            <a:pPr>
+              <a:spcAft>
+                <a:spcPts val="810"/>
+              </a:spcAft>
+            </a:pPr>
+            <a:r>
+              <a:rPr sz="1800" b="1">
+                <a:solidFill>
+                  <a:srgbClr val="F4B183"/>
+                </a:solidFill>
+                <a:latin typeface="Nunito Sans"/>
+              </a:rPr>
+              <a:t>BLOQUE 3</a:t>
+            </a:r>
+          </a:p>
+        </p:txBody>
+      </p:sp>
+      <p:sp>
+        <p:nvSpPr>
+          <p:cNvPr id="3" name="TextBox 2"/>
+          <p:cNvSpPr txBox="1"/>
+          <p:nvPr/>
+        </p:nvSpPr>
+        <p:spPr>
+          <a:xfrm>
+            <a:off x="640000" y="2800000"/>
+            <a:ext cx="10912000" cy="800000"/>
+          </a:xfrm>
+          <a:prstGeom prst="rect">
+            <a:avLst/>
+          </a:prstGeom>
+          <a:noFill/>
+        </p:spPr>
+        <p:txBody>
+          <a:bodyPr wrap="square">
+            <a:spAutoFit/>
+          </a:bodyPr>
+          <a:lstStyle/>
+          <a:p>
+            <a:pPr>
+              <a:spcAft>
+                <a:spcPts val="2160"/>
+              </a:spcAft>
+            </a:pPr>
+            <a:r>
+              <a:rPr sz="4800" b="1">
+                <a:solidFill>
+                  <a:srgbClr val="FBF7EF"/>
+                </a:solidFill>
+                <a:latin typeface="Fredoka"/>
+              </a:rPr>
+              <a:t>Ojo con los contraejemplos</a:t>
+            </a:r>
+          </a:p>
+        </p:txBody>
+      </p:sp>
+    </p:spTree>
+  </p:cSld>
+  <p:clrMapOvr>
+    <a:masterClrMapping/>
+  </p:clrMapOvr>
+</p:sld>
+</file>
+
+<file path=ppt/slides/slide15.xml><?xml version="1.0" encoding="utf-8"?>
 <p:sld xmlns:a="http://schemas.openxmlformats.org/drawingml/2006/main" xmlns:p="http://schemas.openxmlformats.org/presentationml/2006/main" xmlns:r="http://schemas.openxmlformats.org/officeDocument/2006/relationships">
   <p:cSld>
     <p:bg>
@@ -4760,7 +5067,7 @@
                 </a:solidFill>
                 <a:latin typeface="Nunito Sans"/>
               </a:rPr>
-              <a:t>CASO TRAMPA · BLOQUE 3 · TRES FORMAS DE NO RESPONDER</a:t>
+              <a:t>CASO TRAMPA · BLOQUE 3 · OJO CON LOS CONTRAEJEMPLOS</a:t>
             </a:r>
           </a:p>
         </p:txBody>
@@ -4799,7 +5106,7 @@
                 </a:solidFill>
                 <a:latin typeface="Fredoka"/>
               </a:rPr>
-              <a:t>⚠ ¿Habla de otra cosa?</a:t>
+              <a:t>⚠ ¿Un contraejemplo lo tumba todo?</a:t>
             </a:r>
           </a:p>
         </p:txBody>
@@ -4881,7 +5188,7 @@
                 </a:solidFill>
                 <a:latin typeface="Nunito Sans"/>
               </a:rPr>
-              <a:t>La madre de una chica: «¿Has hecho los deberes de Matemáticas?». La chica: «La profe de Mates está de baja toda la semana».</a:t>
+              <a:t>Una chica: «A los perros les encanta salir a pasear». Un chico: «El mío odia pasear: se esconde debajo de la cama».</a:t>
             </a:r>
           </a:p>
         </p:txBody>
@@ -4929,7 +5236,7 @@
                 </a:solidFill>
                 <a:latin typeface="Nunito Sans"/>
               </a:rPr>
-              <a:t>No dice ni «sí» ni «no». ¿Es una pista falsa?</a:t>
+              <a:t>El chico tiene un contraejemplo. ¿La frase de la chica es falsa?</a:t>
             </a:r>
           </a:p>
           <a:p>
@@ -4954,7 +5261,25 @@
                 </a:solidFill>
                 <a:latin typeface="Nunito Sans"/>
               </a:rPr>
-              <a:t>Parece que cambia de tema: habla de la profesora.</a:t>
+              <a:t>La chica no dice «todos los perros»: dice cómo </a:t>
+            </a:r>
+            <a:r>
+              <a:rPr sz="2400" b="1">
+                <a:solidFill>
+                  <a:srgbClr val="1F2A44"/>
+                </a:solidFill>
+                <a:latin typeface="Nunito Sans"/>
+              </a:rPr>
+              <a:t>suelen</a:t>
+            </a:r>
+            <a:r>
+              <a:rPr sz="2400" b="0">
+                <a:solidFill>
+                  <a:srgbClr val="1F2A44"/>
+                </a:solidFill>
+                <a:latin typeface="Nunito Sans"/>
+              </a:rPr>
+              <a:t> ser.</a:t>
             </a:r>
           </a:p>
           <a:p>
@@ -4979,7 +5304,7 @@
                 </a:solidFill>
                 <a:latin typeface="Nunito Sans"/>
               </a:rPr>
-              <a:t>Pero puede ser una respuesta: si la profe no está, quizá no ha mandado deberes.</a:t>
+              <a:t>Un perro que no quiere pasear es una excepción, y «suelen» admite excepciones.</a:t>
             </a:r>
           </a:p>
           <a:p>
@@ -5004,7 +5329,7 @@
                 </a:solidFill>
                 <a:latin typeface="Nunito Sans"/>
               </a:rPr>
-              <a:t>La madre puede comprobarlo: «¿Entonces no tienes deberes?».</a:t>
+              <a:t>Para tumbar su frase haría falta ver que la mayoría no quiere pasear.</a:t>
             </a:r>
           </a:p>
           <a:p>
@@ -5029,150 +5354,7 @@
                 </a:solidFill>
                 <a:latin typeface="Nunito Sans"/>
               </a:rPr>
-              <a:t>Conclusión: antes de decir «pista falsa», mira si la respuesta tiene que ver, aunque no lo parezca.</a:t>
-            </a:r>
-          </a:p>
-        </p:txBody>
-      </p:sp>
-    </p:spTree>
-  </p:cSld>
-  <p:clrMapOvr>
-    <a:masterClrMapping/>
-  </p:clrMapOvr>
-</p:sld>
-</file>
-
-<file path=ppt/slides/slide15.xml><?xml version="1.0" encoding="utf-8"?>
-<p:sld xmlns:a="http://schemas.openxmlformats.org/drawingml/2006/main" xmlns:p="http://schemas.openxmlformats.org/presentationml/2006/main" xmlns:r="http://schemas.openxmlformats.org/officeDocument/2006/relationships">
-  <p:cSld>
-    <p:bg>
-      <p:bgPr>
-        <a:solidFill>
-          <a:srgbClr val="FBF7EF"/>
-        </a:solidFill>
-        <a:effectLst/>
-      </p:bgPr>
-    </p:bg>
-    <p:spTree>
-      <p:nvGrpSpPr>
-        <p:cNvPr id="1" name=""/>
-        <p:cNvGrpSpPr/>
-        <p:nvPr/>
-      </p:nvGrpSpPr>
-      <p:grpSpPr/>
-      <p:sp>
-        <p:nvSpPr>
-          <p:cNvPr id="2" name="TextBox 1"/>
-          <p:cNvSpPr txBox="1"/>
-          <p:nvPr/>
-        </p:nvSpPr>
-        <p:spPr>
-          <a:xfrm>
-            <a:off x="640000" y="380000"/>
-            <a:ext cx="10912000" cy="420000"/>
-          </a:xfrm>
-          <a:prstGeom prst="rect">
-            <a:avLst/>
-          </a:prstGeom>
-          <a:noFill/>
-        </p:spPr>
-        <p:txBody>
-          <a:bodyPr wrap="square">
-            <a:spAutoFit/>
-          </a:bodyPr>
-          <a:lstStyle/>
-          <a:p>
-            <a:pPr>
-              <a:spcAft>
-                <a:spcPts val="630"/>
-              </a:spcAft>
-            </a:pPr>
-            <a:r>
-              <a:rPr sz="1400" b="1">
-                <a:solidFill>
-                  <a:srgbClr val="E8793A"/>
-                </a:solidFill>
-                <a:latin typeface="Nunito Sans"/>
-              </a:rPr>
-              <a:t>LO DE HOY EN TRES LÍNEAS</a:t>
-            </a:r>
-          </a:p>
-        </p:txBody>
-      </p:sp>
-      <p:sp>
-        <p:nvSpPr>
-          <p:cNvPr id="3" name="TextBox 2"/>
-          <p:cNvSpPr txBox="1"/>
-          <p:nvPr/>
-        </p:nvSpPr>
-        <p:spPr>
-          <a:xfrm>
-            <a:off x="640000" y="760000"/>
-            <a:ext cx="10912000" cy="800000"/>
-          </a:xfrm>
-          <a:prstGeom prst="rect">
-            <a:avLst/>
-          </a:prstGeom>
-          <a:noFill/>
-        </p:spPr>
-        <p:txBody>
-          <a:bodyPr wrap="square">
-            <a:spAutoFit/>
-          </a:bodyPr>
-          <a:lstStyle/>
-          <a:p>
-            <a:pPr>
-              <a:spcAft>
-                <a:spcPts val="1710"/>
-              </a:spcAft>
-            </a:pPr>
-            <a:r>
-              <a:rPr sz="3800" b="1">
-                <a:solidFill>
-                  <a:srgbClr val="1F2A44"/>
-                </a:solidFill>
-                <a:latin typeface="Fredoka"/>
-              </a:rPr>
-              <a:t>Escríbelo tú primero, sin mirar</a:t>
-            </a:r>
-          </a:p>
-        </p:txBody>
-      </p:sp>
-      <p:sp>
-        <p:nvSpPr>
-          <p:cNvPr id="4" name="TextBox 3"/>
-          <p:cNvSpPr txBox="1"/>
-          <p:nvPr/>
-        </p:nvSpPr>
-        <p:spPr>
-          <a:xfrm>
-            <a:off x="640000" y="1800000"/>
-            <a:ext cx="10912000" cy="1500000"/>
-          </a:xfrm>
-          <a:prstGeom prst="rect">
-            <a:avLst/>
-          </a:prstGeom>
-          <a:noFill/>
-        </p:spPr>
-        <p:txBody>
-          <a:bodyPr wrap="square">
-            <a:spAutoFit/>
-          </a:bodyPr>
-          <a:lstStyle/>
-          <a:p>
-            <a:pPr>
-              <a:spcAft>
-                <a:spcPts val="1170"/>
-              </a:spcAft>
-            </a:pPr>
-            <a:r>
-              <a:rPr sz="2600" b="0">
-                <a:solidFill>
-                  <a:srgbClr val="4A5568"/>
-                </a:solidFill>
-                <a:latin typeface="Nunito Sans"/>
-              </a:rPr>
-              <a:t>Dos minutos. Después lo comparamos.</a:t>
+              <a:t>Conclusión: un contraejemplo tumba un «todos», no un «casi todos». Mira bien qué dice la frase.</a:t>
             </a:r>
           </a:p>
         </p:txBody>
@@ -5250,8 +5432,8 @@
         </p:nvSpPr>
         <p:spPr>
           <a:xfrm>
-            <a:off x="640000" y="1300000"/>
-            <a:ext cx="10912000" cy="4800000"/>
+            <a:off x="640000" y="760000"/>
+            <a:ext cx="10912000" cy="800000"/>
           </a:xfrm>
           <a:prstGeom prst="rect">
             <a:avLst/>
@@ -5266,76 +5448,56 @@
           <a:p>
             <a:pPr>
               <a:spcAft>
-                <a:spcPts val="1350"/>
-              </a:spcAft>
-            </a:pPr>
-            <a:r>
-              <a:rPr sz="3000" b="1">
-                <a:solidFill>
-                  <a:srgbClr val="E8793A"/>
-                </a:solidFill>
-                <a:latin typeface="Nunito Sans"/>
-              </a:rPr>
-              <a:t>1. </a:t>
-            </a:r>
-            <a:r>
-              <a:rPr sz="3000" b="0">
+                <a:spcPts val="1710"/>
+              </a:spcAft>
+            </a:pPr>
+            <a:r>
+              <a:rPr sz="3800" b="1">
                 <a:solidFill>
                   <a:srgbClr val="1F2A44"/>
                 </a:solidFill>
-                <a:latin typeface="Nunito Sans"/>
-              </a:rPr>
-              <a:t>La pista falsa cambia de tema para no responder.</a:t>
-            </a:r>
-          </a:p>
-          <a:p>
-            <a:pPr>
-              <a:spcAft>
-                <a:spcPts val="1350"/>
-              </a:spcAft>
-            </a:pPr>
-            <a:r>
-              <a:rPr sz="3000" b="1">
-                <a:solidFill>
-                  <a:srgbClr val="E8793A"/>
-                </a:solidFill>
-                <a:latin typeface="Nunito Sans"/>
-              </a:rPr>
-              <a:t>2. </a:t>
-            </a:r>
-            <a:r>
-              <a:rPr sz="3000" b="0">
-                <a:solidFill>
-                  <a:srgbClr val="1F2A44"/>
-                </a:solidFill>
-                <a:latin typeface="Nunito Sans"/>
-              </a:rPr>
-              <a:t>El nuevo tema suele ser más interesante, y la pregunta se olvida.</a:t>
-            </a:r>
-          </a:p>
-          <a:p>
-            <a:pPr>
-              <a:spcAft>
-                <a:spcPts val="1350"/>
-              </a:spcAft>
-            </a:pPr>
-            <a:r>
-              <a:rPr sz="3000" b="1">
-                <a:solidFill>
-                  <a:srgbClr val="E8793A"/>
-                </a:solidFill>
-                <a:latin typeface="Nunito Sans"/>
-              </a:rPr>
-              <a:t>3. </a:t>
-            </a:r>
-            <a:r>
-              <a:rPr sz="3000" b="0">
-                <a:solidFill>
-                  <a:srgbClr val="1F2A44"/>
-                </a:solidFill>
-                <a:latin typeface="Nunito Sans"/>
-              </a:rPr>
-              <a:t>Para desmontarla: ¿qué tiene que ver esto con lo que hablábamos?</a:t>
+                <a:latin typeface="Fredoka"/>
+              </a:rPr>
+              <a:t>Escríbelo tú primero, sin mirar</a:t>
+            </a:r>
+          </a:p>
+        </p:txBody>
+      </p:sp>
+      <p:sp>
+        <p:nvSpPr>
+          <p:cNvPr id="4" name="TextBox 3"/>
+          <p:cNvSpPr txBox="1"/>
+          <p:nvPr/>
+        </p:nvSpPr>
+        <p:spPr>
+          <a:xfrm>
+            <a:off x="640000" y="1800000"/>
+            <a:ext cx="10912000" cy="1500000"/>
+          </a:xfrm>
+          <a:prstGeom prst="rect">
+            <a:avLst/>
+          </a:prstGeom>
+          <a:noFill/>
+        </p:spPr>
+        <p:txBody>
+          <a:bodyPr wrap="square">
+            <a:spAutoFit/>
+          </a:bodyPr>
+          <a:lstStyle/>
+          <a:p>
+            <a:pPr>
+              <a:spcAft>
+                <a:spcPts val="1170"/>
+              </a:spcAft>
+            </a:pPr>
+            <a:r>
+              <a:rPr sz="2600" b="0">
+                <a:solidFill>
+                  <a:srgbClr val="4A5568"/>
+                </a:solidFill>
+                <a:latin typeface="Nunito Sans"/>
+              </a:rPr>
+              <a:t>Dos minutos. Después lo comparamos.</a:t>
             </a:r>
           </a:p>
         </p:txBody>
@@ -5354,7 +5516,7 @@
     <p:bg>
       <p:bgPr>
         <a:solidFill>
-          <a:srgbClr val="1F2A44"/>
+          <a:srgbClr val="FBF7EF"/>
         </a:solidFill>
         <a:effectLst/>
       </p:bgPr>
@@ -5396,11 +5558,11 @@
             <a:r>
               <a:rPr sz="1400" b="1">
                 <a:solidFill>
-                  <a:srgbClr val="F4B183"/>
-                </a:solidFill>
-                <a:latin typeface="Nunito Sans"/>
-              </a:rPr>
-              <a:t>VÍDEO</a:t>
+                  <a:srgbClr val="E8793A"/>
+                </a:solidFill>
+                <a:latin typeface="Nunito Sans"/>
+              </a:rPr>
+              <a:t>LO DE HOY EN TRES LÍNEAS</a:t>
             </a:r>
           </a:p>
         </p:txBody>
@@ -5413,8 +5575,8 @@
         </p:nvSpPr>
         <p:spPr>
           <a:xfrm>
-            <a:off x="640000" y="760000"/>
-            <a:ext cx="10912000" cy="800000"/>
+            <a:off x="640000" y="1300000"/>
+            <a:ext cx="10912000" cy="4800000"/>
           </a:xfrm>
           <a:prstGeom prst="rect">
             <a:avLst/>
@@ -5429,56 +5591,76 @@
           <a:p>
             <a:pPr>
               <a:spcAft>
-                <a:spcPts val="1620"/>
-              </a:spcAft>
-            </a:pPr>
-            <a:r>
-              <a:rPr sz="3600" b="1">
-                <a:solidFill>
-                  <a:srgbClr val="FBF7EF"/>
-                </a:solidFill>
-                <a:latin typeface="Fredoka"/>
-              </a:rPr>
-              <a:t>La falacia de la pista falsa (red herring)</a:t>
-            </a:r>
-          </a:p>
-        </p:txBody>
-      </p:sp>
-      <p:sp>
-        <p:nvSpPr>
-          <p:cNvPr id="4" name="TextBox 3"/>
-          <p:cNvSpPr txBox="1"/>
-          <p:nvPr/>
-        </p:nvSpPr>
-        <p:spPr>
-          <a:xfrm>
-            <a:off x="640000" y="2200000"/>
-            <a:ext cx="10912000" cy="2000000"/>
-          </a:xfrm>
-          <a:prstGeom prst="rect">
-            <a:avLst/>
-          </a:prstGeom>
-          <a:noFill/>
-        </p:spPr>
-        <p:txBody>
-          <a:bodyPr wrap="square">
-            <a:spAutoFit/>
-          </a:bodyPr>
-          <a:lstStyle/>
-          <a:p>
-            <a:pPr>
-              <a:spcAft>
-                <a:spcPts val="1080"/>
-              </a:spcAft>
-            </a:pPr>
-            <a:r>
-              <a:rPr sz="2400" b="0">
-                <a:solidFill>
-                  <a:srgbClr val="C9D3E6"/>
-                </a:solidFill>
-                <a:latin typeface="Nunito Sans"/>
-              </a:rPr>
-              <a:t>Ver cómo se esquiva una pregunta en entrevistas y debates.</a:t>
+                <a:spcPts val="1350"/>
+              </a:spcAft>
+            </a:pPr>
+            <a:r>
+              <a:rPr sz="3000" b="1">
+                <a:solidFill>
+                  <a:srgbClr val="E8793A"/>
+                </a:solidFill>
+                <a:latin typeface="Nunito Sans"/>
+              </a:rPr>
+              <a:t>1. </a:t>
+            </a:r>
+            <a:r>
+              <a:rPr sz="3000" b="0">
+                <a:solidFill>
+                  <a:srgbClr val="1F2A44"/>
+                </a:solidFill>
+                <a:latin typeface="Nunito Sans"/>
+              </a:rPr>
+              <a:t>Un ejemplo apoya una idea, pero muchos ejemplos no demuestran un «todos».</a:t>
+            </a:r>
+          </a:p>
+          <a:p>
+            <a:pPr>
+              <a:spcAft>
+                <a:spcPts val="1350"/>
+              </a:spcAft>
+            </a:pPr>
+            <a:r>
+              <a:rPr sz="3000" b="1">
+                <a:solidFill>
+                  <a:srgbClr val="E8793A"/>
+                </a:solidFill>
+                <a:latin typeface="Nunito Sans"/>
+              </a:rPr>
+              <a:t>2. </a:t>
+            </a:r>
+            <a:r>
+              <a:rPr sz="3000" b="0">
+                <a:solidFill>
+                  <a:srgbClr val="1F2A44"/>
+                </a:solidFill>
+                <a:latin typeface="Nunito Sans"/>
+              </a:rPr>
+              <a:t>Un contraejemplo basta para tumbar un «todos», un «nadie» o un «nunca».</a:t>
+            </a:r>
+          </a:p>
+          <a:p>
+            <a:pPr>
+              <a:spcAft>
+                <a:spcPts val="1350"/>
+              </a:spcAft>
+            </a:pPr>
+            <a:r>
+              <a:rPr sz="3000" b="1">
+                <a:solidFill>
+                  <a:srgbClr val="E8793A"/>
+                </a:solidFill>
+                <a:latin typeface="Nunito Sans"/>
+              </a:rPr>
+              <a:t>3. </a:t>
+            </a:r>
+            <a:r>
+              <a:rPr sz="3000" b="0">
+                <a:solidFill>
+                  <a:srgbClr val="1F2A44"/>
+                </a:solidFill>
+                <a:latin typeface="Nunito Sans"/>
+              </a:rPr>
+              <a:t>Una analogía es buena si las dos cosas se parecen en lo que importa.</a:t>
             </a:r>
           </a:p>
         </p:txBody>
@@ -5543,6 +5725,149 @@
                 </a:solidFill>
                 <a:latin typeface="Nunito Sans"/>
               </a:rPr>
+              <a:t>VÍDEO</a:t>
+            </a:r>
+          </a:p>
+        </p:txBody>
+      </p:sp>
+      <p:sp>
+        <p:nvSpPr>
+          <p:cNvPr id="3" name="TextBox 2"/>
+          <p:cNvSpPr txBox="1"/>
+          <p:nvPr/>
+        </p:nvSpPr>
+        <p:spPr>
+          <a:xfrm>
+            <a:off x="640000" y="760000"/>
+            <a:ext cx="10912000" cy="800000"/>
+          </a:xfrm>
+          <a:prstGeom prst="rect">
+            <a:avLst/>
+          </a:prstGeom>
+          <a:noFill/>
+        </p:spPr>
+        <p:txBody>
+          <a:bodyPr wrap="square">
+            <a:spAutoFit/>
+          </a:bodyPr>
+          <a:lstStyle/>
+          <a:p>
+            <a:pPr>
+              <a:spcAft>
+                <a:spcPts val="1620"/>
+              </a:spcAft>
+            </a:pPr>
+            <a:r>
+              <a:rPr sz="3600" b="1">
+                <a:solidFill>
+                  <a:srgbClr val="FBF7EF"/>
+                </a:solidFill>
+                <a:latin typeface="Fredoka"/>
+              </a:rPr>
+              <a:t>Qué es un contraejemplo y qué es un argumento por analogía</a:t>
+            </a:r>
+          </a:p>
+        </p:txBody>
+      </p:sp>
+      <p:sp>
+        <p:nvSpPr>
+          <p:cNvPr id="4" name="TextBox 3"/>
+          <p:cNvSpPr txBox="1"/>
+          <p:nvPr/>
+        </p:nvSpPr>
+        <p:spPr>
+          <a:xfrm>
+            <a:off x="640000" y="2200000"/>
+            <a:ext cx="10912000" cy="2000000"/>
+          </a:xfrm>
+          <a:prstGeom prst="rect">
+            <a:avLst/>
+          </a:prstGeom>
+          <a:noFill/>
+        </p:spPr>
+        <p:txBody>
+          <a:bodyPr wrap="square">
+            <a:spAutoFit/>
+          </a:bodyPr>
+          <a:lstStyle/>
+          <a:p>
+            <a:pPr>
+              <a:spcAft>
+                <a:spcPts val="1080"/>
+              </a:spcAft>
+            </a:pPr>
+            <a:r>
+              <a:rPr sz="2400" b="0">
+                <a:solidFill>
+                  <a:srgbClr val="C9D3E6"/>
+                </a:solidFill>
+                <a:latin typeface="Nunito Sans"/>
+              </a:rPr>
+              <a:t>Ver más casos en los que un solo ejemplo en contra tumba una frase general.</a:t>
+            </a:r>
+          </a:p>
+        </p:txBody>
+      </p:sp>
+    </p:spTree>
+  </p:cSld>
+  <p:clrMapOvr>
+    <a:masterClrMapping/>
+  </p:clrMapOvr>
+</p:sld>
+</file>
+
+<file path=ppt/slides/slide19.xml><?xml version="1.0" encoding="utf-8"?>
+<p:sld xmlns:a="http://schemas.openxmlformats.org/drawingml/2006/main" xmlns:p="http://schemas.openxmlformats.org/presentationml/2006/main" xmlns:r="http://schemas.openxmlformats.org/officeDocument/2006/relationships">
+  <p:cSld>
+    <p:bg>
+      <p:bgPr>
+        <a:solidFill>
+          <a:srgbClr val="1F2A44"/>
+        </a:solidFill>
+        <a:effectLst/>
+      </p:bgPr>
+    </p:bg>
+    <p:spTree>
+      <p:nvGrpSpPr>
+        <p:cNvPr id="1" name=""/>
+        <p:cNvGrpSpPr/>
+        <p:nvPr/>
+      </p:nvGrpSpPr>
+      <p:grpSpPr/>
+      <p:sp>
+        <p:nvSpPr>
+          <p:cNvPr id="2" name="TextBox 1"/>
+          <p:cNvSpPr txBox="1"/>
+          <p:nvPr/>
+        </p:nvSpPr>
+        <p:spPr>
+          <a:xfrm>
+            <a:off x="640000" y="380000"/>
+            <a:ext cx="10912000" cy="420000"/>
+          </a:xfrm>
+          <a:prstGeom prst="rect">
+            <a:avLst/>
+          </a:prstGeom>
+          <a:noFill/>
+        </p:spPr>
+        <p:txBody>
+          <a:bodyPr wrap="square">
+            <a:spAutoFit/>
+          </a:bodyPr>
+          <a:lstStyle/>
+          <a:p>
+            <a:pPr>
+              <a:spcAft>
+                <a:spcPts val="630"/>
+              </a:spcAft>
+            </a:pPr>
+            <a:r>
+              <a:rPr sz="1400" b="1">
+                <a:solidFill>
+                  <a:srgbClr val="F4B183"/>
+                </a:solidFill>
+                <a:latin typeface="Nunito Sans"/>
+              </a:rPr>
               <a:t>AHORA, LA HOJA DEL DÍA</a:t>
             </a:r>
           </a:p>
@@ -6136,7 +6461,7 @@
                 </a:solidFill>
                 <a:latin typeface="Nunito Sans"/>
               </a:rPr>
-              <a:t>Es legítimo si la emoción ______ a las razones; es falacia si las ______.  (sesión 16)</a:t>
+              <a:t>Se creía que todos los cisnes eran blancos, hasta que se encontraron cisnes ______ en Australia.  (sesión 16)</a:t>
             </a:r>
           </a:p>
           <a:p>
@@ -6161,7 +6486,7 @@
                 </a:solidFill>
                 <a:latin typeface="Nunito Sans"/>
               </a:rPr>
-              <a:t>Pregunta para el miedo: ¿ese peligro es ______? ¿Qué pruebas hay?  (sesión 16)</a:t>
+              <a:t>La conclusión de una inducción es ______, no segura.  (sesión 16)</a:t>
             </a:r>
           </a:p>
           <a:p>
@@ -6186,7 +6511,7 @@
                 </a:solidFill>
                 <a:latin typeface="Nunito Sans"/>
               </a:rPr>
-              <a:t>En el cuento, los cortesanos cojeaban para caerle bien al ______.  (sesión 5)</a:t>
+              <a:t>En el cuento, todo el palacio ______ sin razón.  (sesión 5)</a:t>
             </a:r>
           </a:p>
         </p:txBody>
@@ -6338,7 +6663,7 @@
                 </a:solidFill>
                 <a:latin typeface="Nunito Sans"/>
               </a:rPr>
-              <a:t>Es legítimo si la emoción </a:t>
+              <a:t>Se creía que todos los cisnes eran blancos, hasta que se encontraron cisnes </a:t>
             </a:r>
             <a:r>
               <a:rPr sz="2600" b="1">
@@ -6347,7 +6672,7 @@
                 </a:solidFill>
                 <a:latin typeface="Nunito Sans"/>
               </a:rPr>
-              <a:t>acompaña</a:t>
+              <a:t>negros</a:t>
             </a:r>
             <a:r>
               <a:rPr sz="2600" b="0">
@@ -6356,16 +6681,41 @@
                 </a:solidFill>
                 <a:latin typeface="Nunito Sans"/>
               </a:rPr>
-              <a:t> a las razones; es falacia si las </a:t>
-            </a:r>
+              <a:t> en Australia.  (sesión 16)</a:t>
+            </a:r>
+          </a:p>
+          <a:p>
+            <a:pPr>
+              <a:spcAft>
+                <a:spcPts val="1170"/>
+              </a:spcAft>
+            </a:pPr>
             <a:r>
               <a:rPr sz="2600" b="1">
                 <a:solidFill>
+                  <a:srgbClr val="E8793A"/>
+                </a:solidFill>
+                <a:latin typeface="Nunito Sans"/>
+              </a:rPr>
+              <a:t>2. </a:t>
+            </a:r>
+            <a:r>
+              <a:rPr sz="2600" b="0">
+                <a:solidFill>
                   <a:srgbClr val="1F2A44"/>
                 </a:solidFill>
                 <a:latin typeface="Nunito Sans"/>
               </a:rPr>
-              <a:t>sustituyen</a:t>
+              <a:t>La conclusión de una inducción es </a:t>
+            </a:r>
+            <a:r>
+              <a:rPr sz="2600" b="1">
+                <a:solidFill>
+                  <a:srgbClr val="1F2A44"/>
+                </a:solidFill>
+                <a:latin typeface="Nunito Sans"/>
+              </a:rPr>
+              <a:t>probable</a:t>
             </a:r>
             <a:r>
               <a:rPr sz="2600" b="0">
@@ -6374,7 +6724,7 @@
                 </a:solidFill>
                 <a:latin typeface="Nunito Sans"/>
               </a:rPr>
-              <a:t>.  (sesión 16)</a:t>
+              <a:t>, no segura.  (sesión 16)</a:t>
             </a:r>
           </a:p>
           <a:p>
@@ -6390,7 +6740,7 @@
                 </a:solidFill>
                 <a:latin typeface="Nunito Sans"/>
               </a:rPr>
-              <a:t>2. </a:t>
+              <a:t>3. </a:t>
             </a:r>
             <a:r>
               <a:rPr sz="2600" b="0">
@@ -6399,7 +6749,7 @@
                 </a:solidFill>
                 <a:latin typeface="Nunito Sans"/>
               </a:rPr>
-              <a:t>Pregunta para el miedo: ¿ese peligro es </a:t>
+              <a:t>En el cuento, todo el palacio </a:t>
             </a:r>
             <a:r>
               <a:rPr sz="2600" b="1">
@@ -6408,7 +6758,7 @@
                 </a:solidFill>
                 <a:latin typeface="Nunito Sans"/>
               </a:rPr>
-              <a:t>real</a:t>
+              <a:t>cojeaba</a:t>
             </a:r>
             <a:r>
               <a:rPr sz="2600" b="0">
@@ -6417,50 +6767,7 @@
                 </a:solidFill>
                 <a:latin typeface="Nunito Sans"/>
               </a:rPr>
-              <a:t>? ¿Qué pruebas hay?  (sesión 16)</a:t>
-            </a:r>
-          </a:p>
-          <a:p>
-            <a:pPr>
-              <a:spcAft>
-                <a:spcPts val="1170"/>
-              </a:spcAft>
-            </a:pPr>
-            <a:r>
-              <a:rPr sz="2600" b="1">
-                <a:solidFill>
-                  <a:srgbClr val="E8793A"/>
-                </a:solidFill>
-                <a:latin typeface="Nunito Sans"/>
-              </a:rPr>
-              <a:t>3. </a:t>
-            </a:r>
-            <a:r>
-              <a:rPr sz="2600" b="0">
-                <a:solidFill>
-                  <a:srgbClr val="1F2A44"/>
-                </a:solidFill>
-                <a:latin typeface="Nunito Sans"/>
-              </a:rPr>
-              <a:t>En el cuento, los cortesanos cojeaban para caerle bien al </a:t>
-            </a:r>
-            <a:r>
-              <a:rPr sz="2600" b="1">
-                <a:solidFill>
-                  <a:srgbClr val="1F2A44"/>
-                </a:solidFill>
-                <a:latin typeface="Nunito Sans"/>
-              </a:rPr>
-              <a:t>rey</a:t>
-            </a:r>
-            <a:r>
-              <a:rPr sz="2600" b="0">
-                <a:solidFill>
-                  <a:srgbClr val="1F2A44"/>
-                </a:solidFill>
-                <a:latin typeface="Nunito Sans"/>
-              </a:rPr>
-              <a:t>.  (sesión 5)</a:t>
+              <a:t> sin razón.  (sesión 5)</a:t>
             </a:r>
           </a:p>
         </p:txBody>
@@ -6607,7 +6914,7 @@
                 </a:solidFill>
                 <a:latin typeface="Nunito Sans"/>
               </a:rPr>
-              <a:t>La madre de una chica: «¿Has hecho los deberes?». La chica: «¿Sabías que el Athletic ha fichado a un delantero nuevo?».</a:t>
+              <a:t>Un chico dice: «Todos los gatos odian el agua». Una chica le enseña un vídeo de su gato nadando tan tranquilo.</a:t>
             </a:r>
           </a:p>
         </p:txBody>
@@ -6646,7 +6953,7 @@
                 </a:solidFill>
                 <a:latin typeface="Nunito Sans"/>
               </a:rPr>
-              <a:t>¿Ha contestado la chica? ¿Por qué habrá cambiado de tema?</a:t>
+              <a:t>¿Qué le pasa a la frase de ese chico?</a:t>
             </a:r>
           </a:p>
         </p:txBody>
@@ -6750,7 +7057,7 @@
                 </a:solidFill>
                 <a:latin typeface="Fredoka"/>
               </a:rPr>
-              <a:t>Qué es la pista falsa</a:t>
+              <a:t>Tres herramientas</a:t>
             </a:r>
           </a:p>
         </p:txBody>
@@ -6815,7 +7122,7 @@
                 </a:solidFill>
                 <a:latin typeface="Nunito Sans"/>
               </a:rPr>
-              <a:t>BLOQUE 1 · QUÉ ES LA PISTA FALSA</a:t>
+              <a:t>BLOQUE 1 · TRES HERRAMIENTAS</a:t>
             </a:r>
           </a:p>
         </p:txBody>
@@ -6854,7 +7161,7 @@
                 </a:solidFill>
                 <a:latin typeface="Fredoka"/>
               </a:rPr>
-              <a:t>La pista falsa</a:t>
+              <a:t>Ejemplo</a:t>
             </a:r>
           </a:p>
         </p:txBody>
@@ -6936,7 +7243,43 @@
                 </a:solidFill>
                 <a:latin typeface="Nunito Sans"/>
               </a:rPr>
-              <a:t>Cambiar de tema para no responder a lo que se pregunta o se discute.</a:t>
+              <a:t>Un ejemplo es un caso que </a:t>
+            </a:r>
+            <a:r>
+              <a:rPr sz="2800" b="1">
+                <a:solidFill>
+                  <a:srgbClr val="1F2A44"/>
+                </a:solidFill>
+                <a:latin typeface="Nunito Sans"/>
+              </a:rPr>
+              <a:t>ilustra</a:t>
+            </a:r>
+            <a:r>
+              <a:rPr sz="2800" b="1">
+                <a:solidFill>
+                  <a:srgbClr val="1F2A44"/>
+                </a:solidFill>
+                <a:latin typeface="Nunito Sans"/>
+              </a:rPr>
+              <a:t> o </a:t>
+            </a:r>
+            <a:r>
+              <a:rPr sz="2800" b="1">
+                <a:solidFill>
+                  <a:srgbClr val="1F2A44"/>
+                </a:solidFill>
+                <a:latin typeface="Nunito Sans"/>
+              </a:rPr>
+              <a:t>apoya</a:t>
+            </a:r>
+            <a:r>
+              <a:rPr sz="2800" b="1">
+                <a:solidFill>
+                  <a:srgbClr val="1F2A44"/>
+                </a:solidFill>
+                <a:latin typeface="Nunito Sans"/>
+              </a:rPr>
+              <a:t> una idea.</a:t>
             </a:r>
           </a:p>
         </p:txBody>
@@ -6984,16 +7327,32 @@
                 </a:solidFill>
                 <a:latin typeface="Nunito Sans"/>
               </a:rPr>
-              <a:t>El nuevo tema suele ser más </a:t>
-            </a:r>
+              <a:t>Ayuda a entender</a:t>
+            </a:r>
+          </a:p>
+          <a:p>
+            <a:pPr>
+              <a:spcAft>
+                <a:spcPts val="1260"/>
+              </a:spcAft>
+            </a:pPr>
             <a:r>
               <a:rPr sz="2800" b="1">
                 <a:solidFill>
+                  <a:srgbClr val="E8793A"/>
+                </a:solidFill>
+                <a:latin typeface="Nunito Sans"/>
+              </a:rPr>
+              <a:t>• </a:t>
+            </a:r>
+            <a:r>
+              <a:rPr sz="2800" b="0">
+                <a:solidFill>
                   <a:srgbClr val="1F2A44"/>
                 </a:solidFill>
                 <a:latin typeface="Nunito Sans"/>
               </a:rPr>
-              <a:t>interesante</a:t>
+              <a:t>Muchos ejemplos hacen una idea más probable</a:t>
             </a:r>
           </a:p>
           <a:p>
@@ -7018,93 +7377,7 @@
                 </a:solidFill>
                 <a:latin typeface="Nunito Sans"/>
               </a:rPr>
-              <a:t>La pregunta de verdad se </a:t>
-            </a:r>
-            <a:r>
-              <a:rPr sz="2800" b="1">
-                <a:solidFill>
-                  <a:srgbClr val="1F2A44"/>
-                </a:solidFill>
-                <a:latin typeface="Nunito Sans"/>
-              </a:rPr>
-              <a:t>olvida</a:t>
-            </a:r>
-          </a:p>
-          <a:p>
-            <a:pPr>
-              <a:spcAft>
-                <a:spcPts val="1260"/>
-              </a:spcAft>
-            </a:pPr>
-            <a:r>
-              <a:rPr sz="2800" b="1">
-                <a:solidFill>
-                  <a:srgbClr val="E8793A"/>
-                </a:solidFill>
-                <a:latin typeface="Nunito Sans"/>
-              </a:rPr>
-              <a:t>• </a:t>
-            </a:r>
-            <a:r>
-              <a:rPr sz="2800" b="0">
-                <a:solidFill>
-                  <a:srgbClr val="1F2A44"/>
-                </a:solidFill>
-                <a:latin typeface="Nunito Sans"/>
-              </a:rPr>
-              <a:t>En inglés, </a:t>
-            </a:r>
-            <a:r>
-              <a:rPr sz="2800" b="1">
-                <a:solidFill>
-                  <a:srgbClr val="1F2A44"/>
-                </a:solidFill>
-                <a:latin typeface="Nunito Sans"/>
-              </a:rPr>
-              <a:t>red herring</a:t>
-            </a:r>
-            <a:r>
-              <a:rPr sz="2800" b="0">
-                <a:solidFill>
-                  <a:srgbClr val="1F2A44"/>
-                </a:solidFill>
-                <a:latin typeface="Nunito Sans"/>
-              </a:rPr>
-              <a:t>: se cuenta que despistaba a los perros</a:t>
-            </a:r>
-          </a:p>
-          <a:p>
-            <a:pPr>
-              <a:spcAft>
-                <a:spcPts val="1260"/>
-              </a:spcAft>
-            </a:pPr>
-            <a:r>
-              <a:rPr sz="2800" b="1">
-                <a:solidFill>
-                  <a:srgbClr val="E8793A"/>
-                </a:solidFill>
-                <a:latin typeface="Nunito Sans"/>
-              </a:rPr>
-              <a:t>• </a:t>
-            </a:r>
-            <a:r>
-              <a:rPr sz="2800" b="0">
-                <a:solidFill>
-                  <a:srgbClr val="1F2A44"/>
-                </a:solidFill>
-                <a:latin typeface="Nunito Sans"/>
-              </a:rPr>
-              <a:t>Pregunta: </a:t>
-            </a:r>
-            <a:r>
-              <a:rPr sz="2800" b="1">
-                <a:solidFill>
-                  <a:srgbClr val="1F2A44"/>
-                </a:solidFill>
-                <a:latin typeface="Nunito Sans"/>
-              </a:rPr>
-              <a:t>¿qué tiene que ver esto con lo que hablábamos?</a:t>
+              <a:t>Pero no demuestran un «todos» (sesión 16)</a:t>
             </a:r>
           </a:p>
         </p:txBody>
@@ -7169,7 +7442,7 @@
                 </a:solidFill>
                 <a:latin typeface="Nunito Sans"/>
               </a:rPr>
-              <a:t>BLOQUE 1 · QUÉ ES LA PISTA FALSA</a:t>
+              <a:t>BLOQUE 1 · TRES HERRAMIENTAS</a:t>
             </a:r>
           </a:p>
         </p:txBody>
@@ -7208,21 +7481,121 @@
                 </a:solidFill>
                 <a:latin typeface="Fredoka"/>
               </a:rPr>
-              <a:t>Cómo reconocerla</a:t>
-            </a:r>
-          </a:p>
-        </p:txBody>
-      </p:sp>
-      <p:sp>
-        <p:nvSpPr>
-          <p:cNvPr id="4" name="TextBox 3"/>
+              <a:t>Contraejemplo</a:t>
+            </a:r>
+          </a:p>
+        </p:txBody>
+      </p:sp>
+      <p:sp>
+        <p:nvSpPr>
+          <p:cNvPr id="4" name="Rectangle 3"/>
+          <p:cNvSpPr/>
+          <p:nvPr/>
+        </p:nvSpPr>
+        <p:spPr>
+          <a:xfrm>
+            <a:off x="640000" y="1650000"/>
+            <a:ext cx="10912000" cy="1150000"/>
+          </a:xfrm>
+          <a:prstGeom prst="rect">
+            <a:avLst/>
+          </a:prstGeom>
+          <a:solidFill>
+            <a:srgbClr val="EAF0F7"/>
+          </a:solidFill>
+          <a:ln>
+            <a:noFill/>
+          </a:ln>
+        </p:spPr>
+        <p:style>
+          <a:lnRef idx="1">
+            <a:schemeClr val="accent1"/>
+          </a:lnRef>
+          <a:fillRef idx="3">
+            <a:schemeClr val="accent1"/>
+          </a:fillRef>
+          <a:effectRef idx="2">
+            <a:schemeClr val="accent1"/>
+          </a:effectRef>
+          <a:fontRef idx="minor">
+            <a:schemeClr val="lt1"/>
+          </a:fontRef>
+        </p:style>
+        <p:txBody>
+          <a:bodyPr rtlCol="0" anchor="ctr"/>
+          <a:lstStyle/>
+          <a:p>
+            <a:pPr algn="ctr"/>
+          </a:p>
+        </p:txBody>
+      </p:sp>
+      <p:sp>
+        <p:nvSpPr>
+          <p:cNvPr id="5" name="TextBox 4"/>
           <p:cNvSpPr txBox="1"/>
           <p:nvPr/>
         </p:nvSpPr>
         <p:spPr>
           <a:xfrm>
-            <a:off x="640000" y="1650000"/>
-            <a:ext cx="10912000" cy="4808000"/>
+            <a:off x="840000" y="1730000"/>
+            <a:ext cx="10512000" cy="1000000"/>
+          </a:xfrm>
+          <a:prstGeom prst="rect">
+            <a:avLst/>
+          </a:prstGeom>
+          <a:noFill/>
+        </p:spPr>
+        <p:txBody>
+          <a:bodyPr wrap="square" anchor="ctr">
+            <a:spAutoFit/>
+          </a:bodyPr>
+          <a:lstStyle/>
+          <a:p>
+            <a:pPr>
+              <a:spcAft>
+                <a:spcPts val="1260"/>
+              </a:spcAft>
+            </a:pPr>
+            <a:r>
+              <a:rPr sz="2800" b="1">
+                <a:solidFill>
+                  <a:srgbClr val="1F2A44"/>
+                </a:solidFill>
+                <a:latin typeface="Nunito Sans"/>
+              </a:rPr>
+              <a:t>Un contraejemplo es un caso que va </a:t>
+            </a:r>
+            <a:r>
+              <a:rPr sz="2800" b="1">
+                <a:solidFill>
+                  <a:srgbClr val="1F2A44"/>
+                </a:solidFill>
+                <a:latin typeface="Nunito Sans"/>
+              </a:rPr>
+              <a:t>en contra</a:t>
+            </a:r>
+            <a:r>
+              <a:rPr sz="2800" b="1">
+                <a:solidFill>
+                  <a:srgbClr val="1F2A44"/>
+                </a:solidFill>
+                <a:latin typeface="Nunito Sans"/>
+              </a:rPr>
+              <a:t> de una afirmación general.</a:t>
+            </a:r>
+          </a:p>
+        </p:txBody>
+      </p:sp>
+      <p:sp>
+        <p:nvSpPr>
+          <p:cNvPr id="6" name="TextBox 5"/>
+          <p:cNvSpPr txBox="1"/>
+          <p:nvPr/>
+        </p:nvSpPr>
+        <p:spPr>
+          <a:xfrm>
+            <a:off x="640000" y="3000000"/>
+            <a:ext cx="10912000" cy="3458000"/>
           </a:xfrm>
           <a:prstGeom prst="rect">
             <a:avLst/>
@@ -7256,16 +7629,41 @@
                 </a:solidFill>
                 <a:latin typeface="Nunito Sans"/>
               </a:rPr>
-              <a:t>La respuesta habla de </a:t>
-            </a:r>
+              <a:t>Tumba frases con «todos», «nadie», «siempre», «nunca»</a:t>
+            </a:r>
+          </a:p>
+          <a:p>
+            <a:pPr>
+              <a:spcAft>
+                <a:spcPts val="1260"/>
+              </a:spcAft>
+            </a:pPr>
             <a:r>
               <a:rPr sz="2800" b="1">
                 <a:solidFill>
+                  <a:srgbClr val="E8793A"/>
+                </a:solidFill>
+                <a:latin typeface="Nunito Sans"/>
+              </a:rPr>
+              <a:t>• </a:t>
+            </a:r>
+            <a:r>
+              <a:rPr sz="2800" b="1">
+                <a:solidFill>
                   <a:srgbClr val="1F2A44"/>
                 </a:solidFill>
                 <a:latin typeface="Nunito Sans"/>
               </a:rPr>
-              <a:t>otra cosa</a:t>
+              <a:t>Basta uno</a:t>
+            </a:r>
+            <a:r>
+              <a:rPr sz="2800" b="0">
+                <a:solidFill>
+                  <a:srgbClr val="1F2A44"/>
+                </a:solidFill>
+                <a:latin typeface="Nunito Sans"/>
+              </a:rPr>
+              <a:t> para tumbar un «todos»</a:t>
             </a:r>
           </a:p>
           <a:p>
@@ -7290,66 +7688,7 @@
                 </a:solidFill>
                 <a:latin typeface="Nunito Sans"/>
               </a:rPr>
-              <a:t>Suele empezar con «ya, pero…» o «¿y qué me dices de…?»</a:t>
-            </a:r>
-          </a:p>
-          <a:p>
-            <a:pPr>
-              <a:spcAft>
-                <a:spcPts val="1260"/>
-              </a:spcAft>
-            </a:pPr>
-            <a:r>
-              <a:rPr sz="2800" b="1">
-                <a:solidFill>
-                  <a:srgbClr val="E8793A"/>
-                </a:solidFill>
-                <a:latin typeface="Nunito Sans"/>
-              </a:rPr>
-              <a:t>• </a:t>
-            </a:r>
-            <a:r>
-              <a:rPr sz="2800" b="0">
-                <a:solidFill>
-                  <a:srgbClr val="1F2A44"/>
-                </a:solidFill>
-                <a:latin typeface="Nunito Sans"/>
-              </a:rPr>
-              <a:t>Al final nadie recuerda la pregunta del principio</a:t>
-            </a:r>
-          </a:p>
-          <a:p>
-            <a:pPr>
-              <a:spcAft>
-                <a:spcPts val="1260"/>
-              </a:spcAft>
-            </a:pPr>
-            <a:r>
-              <a:rPr sz="2800" b="1">
-                <a:solidFill>
-                  <a:srgbClr val="E8793A"/>
-                </a:solidFill>
-                <a:latin typeface="Nunito Sans"/>
-              </a:rPr>
-              <a:t>• </a:t>
-            </a:r>
-            <a:r>
-              <a:rPr sz="2800" b="0">
-                <a:solidFill>
-                  <a:srgbClr val="1F2A44"/>
-                </a:solidFill>
-                <a:latin typeface="Nunito Sans"/>
-              </a:rPr>
-              <a:t>No es mentir: es </a:t>
-            </a:r>
-            <a:r>
-              <a:rPr sz="2800" b="1">
-                <a:solidFill>
-                  <a:srgbClr val="1F2A44"/>
-                </a:solidFill>
-                <a:latin typeface="Nunito Sans"/>
-              </a:rPr>
-              <a:t>esquivar</a:t>
+              <a:t>«Todos los gatos odian el agua» → un gato que nada</a:t>
             </a:r>
           </a:p>
         </p:txBody>
@@ -7363,6 +7702,317 @@
 </file>
 
 <file path=ppt/slides/slide8.xml><?xml version="1.0" encoding="utf-8"?>
+<p:sld xmlns:a="http://schemas.openxmlformats.org/drawingml/2006/main" xmlns:p="http://schemas.openxmlformats.org/presentationml/2006/main" xmlns:r="http://schemas.openxmlformats.org/officeDocument/2006/relationships">
+  <p:cSld>
+    <p:bg>
+      <p:bgPr>
+        <a:solidFill>
+          <a:srgbClr val="FBF7EF"/>
+        </a:solidFill>
+        <a:effectLst/>
+      </p:bgPr>
+    </p:bg>
+    <p:spTree>
+      <p:nvGrpSpPr>
+        <p:cNvPr id="1" name=""/>
+        <p:cNvGrpSpPr/>
+        <p:nvPr/>
+      </p:nvGrpSpPr>
+      <p:grpSpPr/>
+      <p:sp>
+        <p:nvSpPr>
+          <p:cNvPr id="2" name="TextBox 1"/>
+          <p:cNvSpPr txBox="1"/>
+          <p:nvPr/>
+        </p:nvSpPr>
+        <p:spPr>
+          <a:xfrm>
+            <a:off x="640000" y="380000"/>
+            <a:ext cx="10912000" cy="420000"/>
+          </a:xfrm>
+          <a:prstGeom prst="rect">
+            <a:avLst/>
+          </a:prstGeom>
+          <a:noFill/>
+        </p:spPr>
+        <p:txBody>
+          <a:bodyPr wrap="square">
+            <a:spAutoFit/>
+          </a:bodyPr>
+          <a:lstStyle/>
+          <a:p>
+            <a:pPr>
+              <a:spcAft>
+                <a:spcPts val="630"/>
+              </a:spcAft>
+            </a:pPr>
+            <a:r>
+              <a:rPr sz="1400" b="1">
+                <a:solidFill>
+                  <a:srgbClr val="E8793A"/>
+                </a:solidFill>
+                <a:latin typeface="Nunito Sans"/>
+              </a:rPr>
+              <a:t>BLOQUE 1 · TRES HERRAMIENTAS</a:t>
+            </a:r>
+          </a:p>
+        </p:txBody>
+      </p:sp>
+      <p:sp>
+        <p:nvSpPr>
+          <p:cNvPr id="3" name="TextBox 2"/>
+          <p:cNvSpPr txBox="1"/>
+          <p:nvPr/>
+        </p:nvSpPr>
+        <p:spPr>
+          <a:xfrm>
+            <a:off x="640000" y="760000"/>
+            <a:ext cx="10912000" cy="800000"/>
+          </a:xfrm>
+          <a:prstGeom prst="rect">
+            <a:avLst/>
+          </a:prstGeom>
+          <a:noFill/>
+        </p:spPr>
+        <p:txBody>
+          <a:bodyPr wrap="square">
+            <a:spAutoFit/>
+          </a:bodyPr>
+          <a:lstStyle/>
+          <a:p>
+            <a:pPr>
+              <a:spcAft>
+                <a:spcPts val="1710"/>
+              </a:spcAft>
+            </a:pPr>
+            <a:r>
+              <a:rPr sz="3800" b="1">
+                <a:solidFill>
+                  <a:srgbClr val="1F2A44"/>
+                </a:solidFill>
+                <a:latin typeface="Fredoka"/>
+              </a:rPr>
+              <a:t>Analogía</a:t>
+            </a:r>
+          </a:p>
+        </p:txBody>
+      </p:sp>
+      <p:sp>
+        <p:nvSpPr>
+          <p:cNvPr id="4" name="Rectangle 3"/>
+          <p:cNvSpPr/>
+          <p:nvPr/>
+        </p:nvSpPr>
+        <p:spPr>
+          <a:xfrm>
+            <a:off x="640000" y="1650000"/>
+            <a:ext cx="10912000" cy="1150000"/>
+          </a:xfrm>
+          <a:prstGeom prst="rect">
+            <a:avLst/>
+          </a:prstGeom>
+          <a:solidFill>
+            <a:srgbClr val="EAF0F7"/>
+          </a:solidFill>
+          <a:ln>
+            <a:noFill/>
+          </a:ln>
+        </p:spPr>
+        <p:style>
+          <a:lnRef idx="1">
+            <a:schemeClr val="accent1"/>
+          </a:lnRef>
+          <a:fillRef idx="3">
+            <a:schemeClr val="accent1"/>
+          </a:fillRef>
+          <a:effectRef idx="2">
+            <a:schemeClr val="accent1"/>
+          </a:effectRef>
+          <a:fontRef idx="minor">
+            <a:schemeClr val="lt1"/>
+          </a:fontRef>
+        </p:style>
+        <p:txBody>
+          <a:bodyPr rtlCol="0" anchor="ctr"/>
+          <a:lstStyle/>
+          <a:p>
+            <a:pPr algn="ctr"/>
+          </a:p>
+        </p:txBody>
+      </p:sp>
+      <p:sp>
+        <p:nvSpPr>
+          <p:cNvPr id="5" name="TextBox 4"/>
+          <p:cNvSpPr txBox="1"/>
+          <p:nvPr/>
+        </p:nvSpPr>
+        <p:spPr>
+          <a:xfrm>
+            <a:off x="840000" y="1730000"/>
+            <a:ext cx="10512000" cy="1000000"/>
+          </a:xfrm>
+          <a:prstGeom prst="rect">
+            <a:avLst/>
+          </a:prstGeom>
+          <a:noFill/>
+        </p:spPr>
+        <p:txBody>
+          <a:bodyPr wrap="square" anchor="ctr">
+            <a:spAutoFit/>
+          </a:bodyPr>
+          <a:lstStyle/>
+          <a:p>
+            <a:pPr>
+              <a:spcAft>
+                <a:spcPts val="1260"/>
+              </a:spcAft>
+            </a:pPr>
+            <a:r>
+              <a:rPr sz="2800" b="1">
+                <a:solidFill>
+                  <a:srgbClr val="1F2A44"/>
+                </a:solidFill>
+                <a:latin typeface="Nunito Sans"/>
+              </a:rPr>
+              <a:t>Una analogía </a:t>
+            </a:r>
+            <a:r>
+              <a:rPr sz="2800" b="1">
+                <a:solidFill>
+                  <a:srgbClr val="1F2A44"/>
+                </a:solidFill>
+                <a:latin typeface="Nunito Sans"/>
+              </a:rPr>
+              <a:t>compara</a:t>
+            </a:r>
+            <a:r>
+              <a:rPr sz="2800" b="1">
+                <a:solidFill>
+                  <a:srgbClr val="1F2A44"/>
+                </a:solidFill>
+                <a:latin typeface="Nunito Sans"/>
+              </a:rPr>
+              <a:t> dos cosas: si se parecen en lo que importa, lo que vale para una seguramente vale para la otra.</a:t>
+            </a:r>
+          </a:p>
+        </p:txBody>
+      </p:sp>
+      <p:sp>
+        <p:nvSpPr>
+          <p:cNvPr id="6" name="TextBox 5"/>
+          <p:cNvSpPr txBox="1"/>
+          <p:nvPr/>
+        </p:nvSpPr>
+        <p:spPr>
+          <a:xfrm>
+            <a:off x="640000" y="3000000"/>
+            <a:ext cx="10912000" cy="3458000"/>
+          </a:xfrm>
+          <a:prstGeom prst="rect">
+            <a:avLst/>
+          </a:prstGeom>
+          <a:noFill/>
+        </p:spPr>
+        <p:txBody>
+          <a:bodyPr wrap="square">
+            <a:spAutoFit/>
+          </a:bodyPr>
+          <a:lstStyle/>
+          <a:p>
+            <a:pPr>
+              <a:spcAft>
+                <a:spcPts val="1260"/>
+              </a:spcAft>
+            </a:pPr>
+            <a:r>
+              <a:rPr sz="2800" b="1">
+                <a:solidFill>
+                  <a:srgbClr val="E8793A"/>
+                </a:solidFill>
+                <a:latin typeface="Nunito Sans"/>
+              </a:rPr>
+              <a:t>• </a:t>
+            </a:r>
+            <a:r>
+              <a:rPr sz="2800" b="0">
+                <a:solidFill>
+                  <a:srgbClr val="1F2A44"/>
+                </a:solidFill>
+                <a:latin typeface="Nunito Sans"/>
+              </a:rPr>
+              <a:t>«Si el casco protege en la bici, también protegerá en el patinete»</a:t>
+            </a:r>
+          </a:p>
+          <a:p>
+            <a:pPr>
+              <a:spcAft>
+                <a:spcPts val="1260"/>
+              </a:spcAft>
+            </a:pPr>
+            <a:r>
+              <a:rPr sz="2800" b="1">
+                <a:solidFill>
+                  <a:srgbClr val="E8793A"/>
+                </a:solidFill>
+                <a:latin typeface="Nunito Sans"/>
+              </a:rPr>
+              <a:t>• </a:t>
+            </a:r>
+            <a:r>
+              <a:rPr sz="2800" b="0">
+                <a:solidFill>
+                  <a:srgbClr val="1F2A44"/>
+                </a:solidFill>
+                <a:latin typeface="Nunito Sans"/>
+              </a:rPr>
+              <a:t>Es buena si se parecen </a:t>
+            </a:r>
+            <a:r>
+              <a:rPr sz="2800" b="1">
+                <a:solidFill>
+                  <a:srgbClr val="1F2A44"/>
+                </a:solidFill>
+                <a:latin typeface="Nunito Sans"/>
+              </a:rPr>
+              <a:t>en lo que importa</a:t>
+            </a:r>
+          </a:p>
+          <a:p>
+            <a:pPr>
+              <a:spcAft>
+                <a:spcPts val="1260"/>
+              </a:spcAft>
+            </a:pPr>
+            <a:r>
+              <a:rPr sz="2800" b="1">
+                <a:solidFill>
+                  <a:srgbClr val="E8793A"/>
+                </a:solidFill>
+                <a:latin typeface="Nunito Sans"/>
+              </a:rPr>
+              <a:t>• </a:t>
+            </a:r>
+            <a:r>
+              <a:rPr sz="2800" b="0">
+                <a:solidFill>
+                  <a:srgbClr val="1F2A44"/>
+                </a:solidFill>
+                <a:latin typeface="Nunito Sans"/>
+              </a:rPr>
+              <a:t>Como la inducción: da una conclusión probable, no segura</a:t>
+            </a:r>
+          </a:p>
+        </p:txBody>
+      </p:sp>
+    </p:spTree>
+  </p:cSld>
+  <p:clrMapOvr>
+    <a:masterClrMapping/>
+  </p:clrMapOvr>
+</p:sld>
+</file>
+
+<file path=ppt/slides/slide9.xml><?xml version="1.0" encoding="utf-8"?>
 <p:sld xmlns:a="http://schemas.openxmlformats.org/drawingml/2006/main" xmlns:p="http://schemas.openxmlformats.org/presentationml/2006/main" xmlns:r="http://schemas.openxmlformats.org/officeDocument/2006/relationships">
   <p:cSld>
     <p:bg>
@@ -7454,315 +8104,6 @@
                 <a:latin typeface="Fredoka"/>
               </a:rPr>
               <a:t>Casos resueltos</a:t>
-            </a:r>
-          </a:p>
-        </p:txBody>
-      </p:sp>
-    </p:spTree>
-  </p:cSld>
-  <p:clrMapOvr>
-    <a:masterClrMapping/>
-  </p:clrMapOvr>
-</p:sld>
-</file>
-
-<file path=ppt/slides/slide9.xml><?xml version="1.0" encoding="utf-8"?>
-<p:sld xmlns:a="http://schemas.openxmlformats.org/drawingml/2006/main" xmlns:p="http://schemas.openxmlformats.org/presentationml/2006/main" xmlns:r="http://schemas.openxmlformats.org/officeDocument/2006/relationships">
-  <p:cSld>
-    <p:bg>
-      <p:bgPr>
-        <a:solidFill>
-          <a:srgbClr val="FBF7EF"/>
-        </a:solidFill>
-        <a:effectLst/>
-      </p:bgPr>
-    </p:bg>
-    <p:spTree>
-      <p:nvGrpSpPr>
-        <p:cNvPr id="1" name=""/>
-        <p:cNvGrpSpPr/>
-        <p:nvPr/>
-      </p:nvGrpSpPr>
-      <p:grpSpPr/>
-      <p:sp>
-        <p:nvSpPr>
-          <p:cNvPr id="2" name="TextBox 1"/>
-          <p:cNvSpPr txBox="1"/>
-          <p:nvPr/>
-        </p:nvSpPr>
-        <p:spPr>
-          <a:xfrm>
-            <a:off x="640000" y="380000"/>
-            <a:ext cx="10912000" cy="420000"/>
-          </a:xfrm>
-          <a:prstGeom prst="rect">
-            <a:avLst/>
-          </a:prstGeom>
-          <a:noFill/>
-        </p:spPr>
-        <p:txBody>
-          <a:bodyPr wrap="square">
-            <a:spAutoFit/>
-          </a:bodyPr>
-          <a:lstStyle/>
-          <a:p>
-            <a:pPr>
-              <a:spcAft>
-                <a:spcPts val="630"/>
-              </a:spcAft>
-            </a:pPr>
-            <a:r>
-              <a:rPr sz="1400" b="1">
-                <a:solidFill>
-                  <a:srgbClr val="E8793A"/>
-                </a:solidFill>
-                <a:latin typeface="Nunito Sans"/>
-              </a:rPr>
-              <a:t>BLOQUE 2 · CASOS RESUELTOS</a:t>
-            </a:r>
-          </a:p>
-        </p:txBody>
-      </p:sp>
-      <p:sp>
-        <p:nvSpPr>
-          <p:cNvPr id="3" name="TextBox 2"/>
-          <p:cNvSpPr txBox="1"/>
-          <p:nvPr/>
-        </p:nvSpPr>
-        <p:spPr>
-          <a:xfrm>
-            <a:off x="640000" y="760000"/>
-            <a:ext cx="10912000" cy="800000"/>
-          </a:xfrm>
-          <a:prstGeom prst="rect">
-            <a:avLst/>
-          </a:prstGeom>
-          <a:noFill/>
-        </p:spPr>
-        <p:txBody>
-          <a:bodyPr wrap="square">
-            <a:spAutoFit/>
-          </a:bodyPr>
-          <a:lstStyle/>
-          <a:p>
-            <a:pPr>
-              <a:spcAft>
-                <a:spcPts val="1710"/>
-              </a:spcAft>
-            </a:pPr>
-            <a:r>
-              <a:rPr sz="3800" b="1">
-                <a:solidFill>
-                  <a:srgbClr val="1F2A44"/>
-                </a:solidFill>
-                <a:latin typeface="Fredoka"/>
-              </a:rPr>
-              <a:t>Caso 1 · Los deberes</a:t>
-            </a:r>
-          </a:p>
-        </p:txBody>
-      </p:sp>
-      <p:sp>
-        <p:nvSpPr>
-          <p:cNvPr id="4" name="Rectangle 3"/>
-          <p:cNvSpPr/>
-          <p:nvPr/>
-        </p:nvSpPr>
-        <p:spPr>
-          <a:xfrm>
-            <a:off x="640000" y="1600000"/>
-            <a:ext cx="10912000" cy="1100000"/>
-          </a:xfrm>
-          <a:prstGeom prst="rect">
-            <a:avLst/>
-          </a:prstGeom>
-          <a:solidFill>
-            <a:srgbClr val="FFFFFF"/>
-          </a:solidFill>
-          <a:ln>
-            <a:noFill/>
-          </a:ln>
-        </p:spPr>
-        <p:style>
-          <a:lnRef idx="1">
-            <a:schemeClr val="accent1"/>
-          </a:lnRef>
-          <a:fillRef idx="3">
-            <a:schemeClr val="accent1"/>
-          </a:fillRef>
-          <a:effectRef idx="2">
-            <a:schemeClr val="accent1"/>
-          </a:effectRef>
-          <a:fontRef idx="minor">
-            <a:schemeClr val="lt1"/>
-          </a:fontRef>
-        </p:style>
-        <p:txBody>
-          <a:bodyPr rtlCol="0" anchor="ctr"/>
-          <a:lstStyle/>
-          <a:p>
-            <a:pPr algn="ctr"/>
-          </a:p>
-        </p:txBody>
-      </p:sp>
-      <p:sp>
-        <p:nvSpPr>
-          <p:cNvPr id="5" name="TextBox 4"/>
-          <p:cNvSpPr txBox="1"/>
-          <p:nvPr/>
-        </p:nvSpPr>
-        <p:spPr>
-          <a:xfrm>
-            <a:off x="840000" y="1650000"/>
-            <a:ext cx="10512000" cy="1000000"/>
-          </a:xfrm>
-          <a:prstGeom prst="rect">
-            <a:avLst/>
-          </a:prstGeom>
-          <a:noFill/>
-        </p:spPr>
-        <p:txBody>
-          <a:bodyPr wrap="square" anchor="ctr">
-            <a:spAutoFit/>
-          </a:bodyPr>
-          <a:lstStyle/>
-          <a:p>
-            <a:pPr>
-              <a:spcAft>
-                <a:spcPts val="1170"/>
-              </a:spcAft>
-            </a:pPr>
-            <a:r>
-              <a:rPr sz="2600" b="1">
-                <a:solidFill>
-                  <a:srgbClr val="1F2A44"/>
-                </a:solidFill>
-                <a:latin typeface="Nunito Sans"/>
-              </a:rPr>
-              <a:t>La madre de una chica: «¿Has hecho los deberes?». La chica: «¿Sabías que el Athletic ha fichado a un delantero nuevo?».</a:t>
-            </a:r>
-          </a:p>
-        </p:txBody>
-      </p:sp>
-      <p:sp>
-        <p:nvSpPr>
-          <p:cNvPr id="6" name="TextBox 5"/>
-          <p:cNvSpPr txBox="1"/>
-          <p:nvPr/>
-        </p:nvSpPr>
-        <p:spPr>
-          <a:xfrm>
-            <a:off x="640000" y="2900000"/>
-            <a:ext cx="10912000" cy="3500000"/>
-          </a:xfrm>
-          <a:prstGeom prst="rect">
-            <a:avLst/>
-          </a:prstGeom>
-          <a:noFill/>
-        </p:spPr>
-        <p:txBody>
-          <a:bodyPr wrap="square">
-            <a:spAutoFit/>
-          </a:bodyPr>
-          <a:lstStyle/>
-          <a:p>
-            <a:pPr>
-              <a:spcAft>
-                <a:spcPts val="1080"/>
-              </a:spcAft>
-            </a:pPr>
-            <a:r>
-              <a:rPr sz="2400" b="1">
-                <a:solidFill>
-                  <a:srgbClr val="E8793A"/>
-                </a:solidFill>
-                <a:latin typeface="Nunito Sans"/>
-              </a:rPr>
-              <a:t>1. </a:t>
-            </a:r>
-            <a:r>
-              <a:rPr sz="2400" b="0">
-                <a:solidFill>
-                  <a:srgbClr val="1F2A44"/>
-                </a:solidFill>
-                <a:latin typeface="Nunito Sans"/>
-              </a:rPr>
-              <a:t>¿Qué le preguntan? Si ha hecho los deberes.</a:t>
-            </a:r>
-          </a:p>
-          <a:p>
-            <a:pPr>
-              <a:spcAft>
-                <a:spcPts val="1080"/>
-              </a:spcAft>
-            </a:pPr>
-            <a:r>
-              <a:rPr sz="2400" b="1">
-                <a:solidFill>
-                  <a:srgbClr val="E8793A"/>
-                </a:solidFill>
-                <a:latin typeface="Nunito Sans"/>
-              </a:rPr>
-              <a:t>2. </a:t>
-            </a:r>
-            <a:r>
-              <a:rPr sz="2400" b="0">
-                <a:solidFill>
-                  <a:srgbClr val="1F2A44"/>
-                </a:solidFill>
-                <a:latin typeface="Nunito Sans"/>
-              </a:rPr>
-              <a:t>¿Qué responde? Un fichaje del Athletic.</a:t>
-            </a:r>
-          </a:p>
-          <a:p>
-            <a:pPr>
-              <a:spcAft>
-                <a:spcPts val="1080"/>
-              </a:spcAft>
-            </a:pPr>
-            <a:r>
-              <a:rPr sz="2400" b="1">
-                <a:solidFill>
-                  <a:srgbClr val="E8793A"/>
-                </a:solidFill>
-                <a:latin typeface="Nunito Sans"/>
-              </a:rPr>
-              <a:t>3. </a:t>
-            </a:r>
-            <a:r>
-              <a:rPr sz="2400" b="0">
-                <a:solidFill>
-                  <a:srgbClr val="1F2A44"/>
-                </a:solidFill>
-                <a:latin typeface="Nunito Sans"/>
-              </a:rPr>
-              <a:t>¿Tiene que ver? No: es otro tema, más interesante.</a:t>
-            </a:r>
-          </a:p>
-          <a:p>
-            <a:pPr>
-              <a:spcAft>
-                <a:spcPts val="1080"/>
-              </a:spcAft>
-            </a:pPr>
-            <a:r>
-              <a:rPr sz="2400" b="1">
-                <a:solidFill>
-                  <a:srgbClr val="E8793A"/>
-                </a:solidFill>
-                <a:latin typeface="Nunito Sans"/>
-              </a:rPr>
-              <a:t>4. </a:t>
-            </a:r>
-            <a:r>
-              <a:rPr sz="2400" b="0">
-                <a:solidFill>
-                  <a:srgbClr val="1F2A44"/>
-                </a:solidFill>
-                <a:latin typeface="Nunito Sans"/>
-              </a:rPr>
-              <a:t>Conclusión: pista falsa. La pregunta sigue sin respuesta.</a:t>
             </a:r>
           </a:p>
         </p:txBody>
